--- a/slides/Intro_to_Descriptive_Statistics_in_R.pptx
+++ b/slides/Intro_to_Descriptive_Statistics_in_R.pptx
@@ -16,11 +16,11 @@
     <p:sldId id="265" r:id="rId7"/>
     <p:sldId id="272" r:id="rId8"/>
     <p:sldId id="267" r:id="rId9"/>
-    <p:sldId id="273" r:id="rId10"/>
-    <p:sldId id="276" r:id="rId11"/>
-    <p:sldId id="280" r:id="rId12"/>
-    <p:sldId id="281" r:id="rId13"/>
-    <p:sldId id="268" r:id="rId14"/>
+    <p:sldId id="268" r:id="rId10"/>
+    <p:sldId id="273" r:id="rId11"/>
+    <p:sldId id="276" r:id="rId12"/>
+    <p:sldId id="280" r:id="rId13"/>
+    <p:sldId id="281" r:id="rId14"/>
   </p:sldIdLst>
   <p:sldSz cx="12192000" cy="6858000"/>
   <p:notesSz cx="6858000" cy="9144000"/>
@@ -293,7 +293,7 @@
           <a:p>
             <a:fld id="{13F6AEEE-E778-402E-8B8F-9A98AED26EB8}" type="datetimeFigureOut">
               <a:rPr lang="en-GB" smtClean="0"/>
-              <a:t>27/10/2025</a:t>
+              <a:t>11/05/2026</a:t>
             </a:fld>
             <a:endParaRPr lang="en-GB"/>
           </a:p>
@@ -452,7 +452,7 @@
           <a:p>
             <a:fld id="{1386E511-D742-4EFE-90B5-C9FC42762E0F}" type="datetimeFigureOut">
               <a:rPr lang="en-GB" smtClean="0"/>
-              <a:t>27/10/2025</a:t>
+              <a:t>11/05/2026</a:t>
             </a:fld>
             <a:endParaRPr lang="en-GB"/>
           </a:p>
@@ -745,7 +745,7 @@
           </a:lstStyle>
           <a:p>
             <a:r>
-              <a:rPr lang="da-DK" smtClean="0"/>
+              <a:rPr lang="da-DK"/>
               <a:t>Klik for at redigere i master</a:t>
             </a:r>
             <a:endParaRPr lang="da-DK" dirty="0"/>
@@ -983,7 +983,7 @@
             <a:fld id="{DCEB35B1-BC5C-4F24-B72D-591F5A33F1B4}" type="datetime5">
               <a:rPr lang="da-DK" smtClean="0"/>
               <a:pPr/>
-              <a:t>oktober 2025</a:t>
+              <a:t>maj 2026</a:t>
             </a:fld>
             <a:endParaRPr lang="da-DK" dirty="0"/>
           </a:p>
@@ -1035,7 +1035,7 @@
           <a:lstStyle/>
           <a:p>
             <a:r>
-              <a:rPr lang="da-DK" smtClean="0"/>
+              <a:rPr lang="da-DK"/>
               <a:t>Klik for at redigere i master</a:t>
             </a:r>
             <a:endParaRPr lang="da-DK" dirty="0"/>
@@ -1060,7 +1060,7 @@
             <a:fld id="{D975665A-61CB-4DAB-8750-5B97BD1810B6}" type="datetime5">
               <a:rPr lang="da-DK" smtClean="0"/>
               <a:pPr/>
-              <a:t>oktober 2025</a:t>
+              <a:t>maj 2026</a:t>
             </a:fld>
             <a:endParaRPr lang="da-DK" dirty="0"/>
           </a:p>
@@ -1114,7 +1114,7 @@
             <a:fld id="{D975665A-61CB-4DAB-8750-5B97BD1810B6}" type="datetime5">
               <a:rPr lang="da-DK" smtClean="0"/>
               <a:pPr/>
-              <a:t>oktober 2025</a:t>
+              <a:t>maj 2026</a:t>
             </a:fld>
             <a:endParaRPr lang="da-DK" dirty="0"/>
           </a:p>
@@ -2803,16 +2803,6 @@
               </a:rPr>
               <a:t>Sidehoved og Sidefod</a:t>
             </a:r>
-            <a:r>
-              <a:rPr lang="da-DK" altLang="da-DK" sz="900" b="0" noProof="1">
-                <a:solidFill>
-                  <a:schemeClr val="tx1"/>
-                </a:solidFill>
-                <a:latin typeface="Arial" panose="020B0604020202020204" pitchFamily="34" charset="0"/>
-                <a:cs typeface="Arial" panose="020B0604020202020204" pitchFamily="34" charset="0"/>
-              </a:rPr>
-              <a:t/>
-            </a:r>
             <a:br>
               <a:rPr lang="da-DK" altLang="da-DK" sz="900" b="0" noProof="1">
                 <a:solidFill>
@@ -3103,7 +3093,7 @@
             <a:fld id="{D975665A-61CB-4DAB-8750-5B97BD1810B6}" type="datetime5">
               <a:rPr lang="da-DK" smtClean="0"/>
               <a:pPr/>
-              <a:t>oktober 2025</a:t>
+              <a:t>maj 2026</a:t>
             </a:fld>
             <a:endParaRPr lang="da-DK" dirty="0"/>
           </a:p>
@@ -3200,7 +3190,7 @@
           </a:lstStyle>
           <a:p>
             <a:r>
-              <a:rPr lang="da-DK" smtClean="0"/>
+              <a:rPr lang="da-DK"/>
               <a:t>Klik for at redigere i master</a:t>
             </a:r>
             <a:endParaRPr lang="da-DK" dirty="0"/>
@@ -3408,7 +3398,7 @@
             <a:fld id="{DCEB35B1-BC5C-4F24-B72D-591F5A33F1B4}" type="datetime5">
               <a:rPr lang="da-DK" smtClean="0"/>
               <a:pPr/>
-              <a:t>oktober 2025</a:t>
+              <a:t>maj 2026</a:t>
             </a:fld>
             <a:endParaRPr lang="da-DK" dirty="0"/>
           </a:p>
@@ -3511,7 +3501,7 @@
           </a:lstStyle>
           <a:p>
             <a:r>
-              <a:rPr lang="da-DK" smtClean="0"/>
+              <a:rPr lang="da-DK"/>
               <a:t>Klik for at redigere i master</a:t>
             </a:r>
             <a:endParaRPr lang="da-DK" dirty="0"/>
@@ -3719,7 +3709,7 @@
             <a:fld id="{DCEB35B1-BC5C-4F24-B72D-591F5A33F1B4}" type="datetime5">
               <a:rPr lang="da-DK" smtClean="0"/>
               <a:pPr/>
-              <a:t>oktober 2025</a:t>
+              <a:t>maj 2026</a:t>
             </a:fld>
             <a:endParaRPr lang="da-DK" dirty="0"/>
           </a:p>
@@ -3824,7 +3814,7 @@
           </a:lstStyle>
           <a:p>
             <a:r>
-              <a:rPr lang="da-DK" noProof="0" smtClean="0"/>
+              <a:rPr lang="da-DK" noProof="0"/>
               <a:t>Klik på ikonet for at tilføje et billede</a:t>
             </a:r>
             <a:endParaRPr lang="da-DK" noProof="0" dirty="0"/>
@@ -3913,7 +3903,7 @@
           </a:lstStyle>
           <a:p>
             <a:r>
-              <a:rPr lang="da-DK" smtClean="0"/>
+              <a:rPr lang="da-DK"/>
               <a:t>Klik for at redigere i master</a:t>
             </a:r>
             <a:endParaRPr lang="da-DK" dirty="0"/>
@@ -4121,7 +4111,7 @@
             <a:fld id="{DCEB35B1-BC5C-4F24-B72D-591F5A33F1B4}" type="datetime5">
               <a:rPr lang="da-DK" smtClean="0"/>
               <a:pPr/>
-              <a:t>oktober 2025</a:t>
+              <a:t>maj 2026</a:t>
             </a:fld>
             <a:endParaRPr lang="da-DK" dirty="0"/>
           </a:p>
@@ -4178,7 +4168,7 @@
           <a:lstStyle/>
           <a:p>
             <a:r>
-              <a:rPr lang="da-DK" noProof="0" smtClean="0"/>
+              <a:rPr lang="da-DK" noProof="0"/>
               <a:t>Klik for at redigere i master</a:t>
             </a:r>
             <a:endParaRPr lang="da-DK" noProof="0" dirty="0"/>
@@ -4207,35 +4197,35 @@
           <a:p>
             <a:pPr lvl="0"/>
             <a:r>
-              <a:rPr lang="da-DK" smtClean="0"/>
+              <a:rPr lang="da-DK"/>
               <a:t>Rediger typografien i masterens</a:t>
             </a:r>
           </a:p>
           <a:p>
             <a:pPr lvl="1"/>
             <a:r>
-              <a:rPr lang="da-DK" smtClean="0"/>
+              <a:rPr lang="da-DK"/>
               <a:t>Andet niveau</a:t>
             </a:r>
           </a:p>
           <a:p>
             <a:pPr lvl="2"/>
             <a:r>
-              <a:rPr lang="da-DK" smtClean="0"/>
+              <a:rPr lang="da-DK"/>
               <a:t>Tredje niveau</a:t>
             </a:r>
           </a:p>
           <a:p>
             <a:pPr lvl="3"/>
             <a:r>
-              <a:rPr lang="da-DK" smtClean="0"/>
+              <a:rPr lang="da-DK"/>
               <a:t>Fjerde niveau</a:t>
             </a:r>
           </a:p>
           <a:p>
             <a:pPr lvl="4"/>
             <a:r>
-              <a:rPr lang="da-DK" smtClean="0"/>
+              <a:rPr lang="da-DK"/>
               <a:t>Femte niveau</a:t>
             </a:r>
             <a:endParaRPr lang="da-DK" dirty="0"/>
@@ -4260,7 +4250,7 @@
             <a:fld id="{D975665A-61CB-4DAB-8750-5B97BD1810B6}" type="datetime5">
               <a:rPr lang="da-DK" smtClean="0"/>
               <a:pPr/>
-              <a:t>oktober 2025</a:t>
+              <a:t>maj 2026</a:t>
             </a:fld>
             <a:endParaRPr lang="da-DK" dirty="0"/>
           </a:p>
@@ -4276,7 +4266,7 @@
   <p:clrMapOvr>
     <a:masterClrMapping/>
   </p:clrMapOvr>
-  <p:extLst mod="1">
+  <p:extLst>
     <p:ext uri="{DCECCB84-F9BA-43D5-87BE-67443E8EF086}">
       <p15:sldGuideLst xmlns:p15="http://schemas.microsoft.com/office/powerpoint/2012/main">
         <p15:guide id="1" pos="4762" userDrawn="1">
@@ -4328,7 +4318,7 @@
           <a:lstStyle/>
           <a:p>
             <a:r>
-              <a:rPr lang="da-DK" smtClean="0"/>
+              <a:rPr lang="da-DK"/>
               <a:t>Klik for at redigere i master</a:t>
             </a:r>
             <a:endParaRPr lang="da-DK" dirty="0"/>
@@ -4373,35 +4363,35 @@
           <a:p>
             <a:pPr lvl="0"/>
             <a:r>
-              <a:rPr lang="da-DK" smtClean="0"/>
+              <a:rPr lang="da-DK"/>
               <a:t>Rediger typografien i masterens</a:t>
             </a:r>
           </a:p>
           <a:p>
             <a:pPr lvl="1"/>
             <a:r>
-              <a:rPr lang="da-DK" smtClean="0"/>
+              <a:rPr lang="da-DK"/>
               <a:t>Andet niveau</a:t>
             </a:r>
           </a:p>
           <a:p>
             <a:pPr lvl="2"/>
             <a:r>
-              <a:rPr lang="da-DK" smtClean="0"/>
+              <a:rPr lang="da-DK"/>
               <a:t>Tredje niveau</a:t>
             </a:r>
           </a:p>
           <a:p>
             <a:pPr lvl="3"/>
             <a:r>
-              <a:rPr lang="da-DK" smtClean="0"/>
+              <a:rPr lang="da-DK"/>
               <a:t>Fjerde niveau</a:t>
             </a:r>
           </a:p>
           <a:p>
             <a:pPr lvl="4"/>
             <a:r>
-              <a:rPr lang="da-DK" smtClean="0"/>
+              <a:rPr lang="da-DK"/>
               <a:t>Femte niveau</a:t>
             </a:r>
             <a:endParaRPr lang="da-DK" dirty="0"/>
@@ -4562,35 +4552,35 @@
           <a:p>
             <a:pPr lvl="0"/>
             <a:r>
-              <a:rPr lang="da-DK" smtClean="0"/>
+              <a:rPr lang="da-DK"/>
               <a:t>Rediger typografien i masterens</a:t>
             </a:r>
           </a:p>
           <a:p>
             <a:pPr lvl="1"/>
             <a:r>
-              <a:rPr lang="da-DK" smtClean="0"/>
+              <a:rPr lang="da-DK"/>
               <a:t>Andet niveau</a:t>
             </a:r>
           </a:p>
           <a:p>
             <a:pPr lvl="2"/>
             <a:r>
-              <a:rPr lang="da-DK" smtClean="0"/>
+              <a:rPr lang="da-DK"/>
               <a:t>Tredje niveau</a:t>
             </a:r>
           </a:p>
           <a:p>
             <a:pPr lvl="3"/>
             <a:r>
-              <a:rPr lang="da-DK" smtClean="0"/>
+              <a:rPr lang="da-DK"/>
               <a:t>Fjerde niveau</a:t>
             </a:r>
           </a:p>
           <a:p>
             <a:pPr lvl="4"/>
             <a:r>
-              <a:rPr lang="da-DK" smtClean="0"/>
+              <a:rPr lang="da-DK"/>
               <a:t>Femte niveau</a:t>
             </a:r>
             <a:endParaRPr lang="da-DK" dirty="0"/>
@@ -4615,7 +4605,7 @@
             <a:fld id="{D975665A-61CB-4DAB-8750-5B97BD1810B6}" type="datetime5">
               <a:rPr lang="da-DK" smtClean="0"/>
               <a:pPr/>
-              <a:t>oktober 2025</a:t>
+              <a:t>maj 2026</a:t>
             </a:fld>
             <a:endParaRPr lang="da-DK" dirty="0"/>
           </a:p>
@@ -4631,7 +4621,7 @@
   <p:clrMapOvr>
     <a:masterClrMapping/>
   </p:clrMapOvr>
-  <p:extLst mod="1">
+  <p:extLst>
     <p:ext uri="{DCECCB84-F9BA-43D5-87BE-67443E8EF086}">
       <p15:sldGuideLst xmlns:p15="http://schemas.microsoft.com/office/powerpoint/2012/main">
         <p15:guide id="1" orient="horz" pos="1973" userDrawn="1">
@@ -4693,7 +4683,7 @@
           <a:lstStyle/>
           <a:p>
             <a:r>
-              <a:rPr lang="da-DK" smtClean="0"/>
+              <a:rPr lang="da-DK"/>
               <a:t>Klik for at redigere i master</a:t>
             </a:r>
             <a:endParaRPr lang="da-DK" dirty="0"/>
@@ -4738,35 +4728,35 @@
           <a:p>
             <a:pPr lvl="0"/>
             <a:r>
-              <a:rPr lang="da-DK" smtClean="0"/>
+              <a:rPr lang="da-DK"/>
               <a:t>Rediger typografien i masterens</a:t>
             </a:r>
           </a:p>
           <a:p>
             <a:pPr lvl="1"/>
             <a:r>
-              <a:rPr lang="da-DK" smtClean="0"/>
+              <a:rPr lang="da-DK"/>
               <a:t>Andet niveau</a:t>
             </a:r>
           </a:p>
           <a:p>
             <a:pPr lvl="2"/>
             <a:r>
-              <a:rPr lang="da-DK" smtClean="0"/>
+              <a:rPr lang="da-DK"/>
               <a:t>Tredje niveau</a:t>
             </a:r>
           </a:p>
           <a:p>
             <a:pPr lvl="3"/>
             <a:r>
-              <a:rPr lang="da-DK" smtClean="0"/>
+              <a:rPr lang="da-DK"/>
               <a:t>Fjerde niveau</a:t>
             </a:r>
           </a:p>
           <a:p>
             <a:pPr lvl="4"/>
             <a:r>
-              <a:rPr lang="da-DK" smtClean="0"/>
+              <a:rPr lang="da-DK"/>
               <a:t>Femte niveau</a:t>
             </a:r>
             <a:endParaRPr lang="da-DK" dirty="0"/>
@@ -4799,7 +4789,7 @@
           </a:lstStyle>
           <a:p>
             <a:r>
-              <a:rPr lang="da-DK" smtClean="0"/>
+              <a:rPr lang="da-DK"/>
               <a:t>Klik på ikonet for at tilføje et billede</a:t>
             </a:r>
             <a:endParaRPr lang="en-GB"/>
@@ -4824,7 +4814,7 @@
             <a:fld id="{D975665A-61CB-4DAB-8750-5B97BD1810B6}" type="datetime5">
               <a:rPr lang="da-DK" smtClean="0"/>
               <a:pPr/>
-              <a:t>oktober 2025</a:t>
+              <a:t>maj 2026</a:t>
             </a:fld>
             <a:endParaRPr lang="da-DK" dirty="0"/>
           </a:p>
@@ -4840,7 +4830,7 @@
   <p:clrMapOvr>
     <a:masterClrMapping/>
   </p:clrMapOvr>
-  <p:extLst mod="1">
+  <p:extLst>
     <p:ext uri="{DCECCB84-F9BA-43D5-87BE-67443E8EF086}">
       <p15:sldGuideLst xmlns:p15="http://schemas.microsoft.com/office/powerpoint/2012/main">
         <p15:guide id="2" pos="3738" userDrawn="1">
@@ -4949,7 +4939,7 @@
           </a:lstStyle>
           <a:p>
             <a:r>
-              <a:rPr lang="da-DK" smtClean="0"/>
+              <a:rPr lang="da-DK"/>
               <a:t>Klik for at redigere undertiteltypografien i masteren</a:t>
             </a:r>
             <a:endParaRPr lang="da-DK" dirty="0"/>
@@ -5015,7 +5005,7 @@
             <a:fld id="{D975665A-61CB-4DAB-8750-5B97BD1810B6}" type="datetime5">
               <a:rPr lang="da-DK" smtClean="0"/>
               <a:pPr/>
-              <a:t>oktober 2025</a:t>
+              <a:t>maj 2026</a:t>
             </a:fld>
             <a:endParaRPr lang="da-DK" dirty="0"/>
           </a:p>
@@ -5042,7 +5032,7 @@
           <a:lstStyle/>
           <a:p>
             <a:r>
-              <a:rPr lang="da-DK" smtClean="0"/>
+              <a:rPr lang="da-DK"/>
               <a:t>Klik for at redigere i master</a:t>
             </a:r>
             <a:endParaRPr lang="da-DK" dirty="0"/>
@@ -5059,7 +5049,7 @@
   <p:clrMapOvr>
     <a:masterClrMapping/>
   </p:clrMapOvr>
-  <p:extLst mod="1">
+  <p:extLst>
     <p:ext uri="{DCECCB84-F9BA-43D5-87BE-67443E8EF086}">
       <p15:sldGuideLst xmlns:p15="http://schemas.microsoft.com/office/powerpoint/2012/main">
         <p15:guide id="1" orient="horz" pos="3778" userDrawn="1">
@@ -5126,7 +5116,7 @@
           </a:lstStyle>
           <a:p>
             <a:r>
-              <a:rPr lang="da-DK" smtClean="0"/>
+              <a:rPr lang="da-DK"/>
               <a:t>Klik på ikonet for at tilføje et billede</a:t>
             </a:r>
             <a:endParaRPr lang="en-GB"/>
@@ -5192,7 +5182,7 @@
             <a:fld id="{D975665A-61CB-4DAB-8750-5B97BD1810B6}" type="datetime5">
               <a:rPr lang="da-DK" smtClean="0"/>
               <a:pPr/>
-              <a:t>oktober 2025</a:t>
+              <a:t>maj 2026</a:t>
             </a:fld>
             <a:endParaRPr lang="da-DK" dirty="0"/>
           </a:p>
@@ -5208,7 +5198,7 @@
   <p:clrMapOvr>
     <a:masterClrMapping/>
   </p:clrMapOvr>
-  <p:extLst mod="1">
+  <p:extLst>
     <p:ext uri="{DCECCB84-F9BA-43D5-87BE-67443E8EF086}">
       <p15:sldGuideLst xmlns:p15="http://schemas.microsoft.com/office/powerpoint/2012/main">
         <p15:guide id="1" orient="horz" pos="3777" userDrawn="1">
@@ -5310,7 +5300,7 @@
           <a:lstStyle/>
           <a:p>
             <a:r>
-              <a:rPr lang="da-DK" smtClean="0"/>
+              <a:rPr lang="da-DK"/>
               <a:t>Klik for at redigere i master</a:t>
             </a:r>
             <a:endParaRPr lang="en-GB" dirty="0"/>
@@ -5443,7 +5433,7 @@
             <a:fld id="{D975665A-61CB-4DAB-8750-5B97BD1810B6}" type="datetime5">
               <a:rPr lang="da-DK" smtClean="0"/>
               <a:pPr/>
-              <a:t>oktober 2025</a:t>
+              <a:t>maj 2026</a:t>
             </a:fld>
             <a:endParaRPr lang="en-GB" dirty="0"/>
           </a:p>
@@ -5820,7 +5810,7 @@
       </a:lvl9pPr>
     </p:otherStyle>
   </p:txStyles>
-  <p:extLst mod="1">
+  <p:extLst>
     <p:ext uri="{27BBF7A9-308A-43DC-89C8-2F10F3537804}">
       <p15:sldGuideLst xmlns:p15="http://schemas.microsoft.com/office/powerpoint/2012/main">
         <p15:guide id="1" pos="453" userDrawn="1">
@@ -5929,32 +5919,19 @@
           </a:p>
           <a:p>
             <a:r>
-              <a:rPr lang="en-US" dirty="0" smtClean="0"/>
-              <a:t>Digital Information </a:t>
-            </a:r>
-            <a:r>
               <a:rPr lang="en-US" dirty="0"/>
-              <a:t>Specialist at the </a:t>
-            </a:r>
-            <a:r>
-              <a:rPr lang="en-US" dirty="0" smtClean="0"/>
-              <a:t>Royal Danish </a:t>
-            </a:r>
-            <a:r>
-              <a:rPr lang="en-US" dirty="0"/>
-              <a:t>Library </a:t>
-            </a:r>
-            <a:r>
-              <a:rPr lang="da-DK" dirty="0" smtClean="0"/>
+              <a:t>Digital Information Specialist at the Royal Danish Library </a:t>
+            </a:r>
+            <a:r>
+              <a:rPr lang="da-DK" dirty="0"/>
               <a:t>- AUL</a:t>
             </a:r>
           </a:p>
           <a:p>
             <a:r>
-              <a:rPr lang="da-DK" dirty="0" smtClean="0"/>
+              <a:rPr lang="da-DK" dirty="0"/>
               <a:t>BSS Datalab</a:t>
             </a:r>
-            <a:endParaRPr lang="da-DK" dirty="0"/>
           </a:p>
           <a:p>
             <a:endParaRPr lang="da-DK" dirty="0"/>
@@ -5977,10 +5954,9 @@
           <a:lstStyle/>
           <a:p>
             <a:r>
-              <a:rPr lang="da-DK" dirty="0" smtClean="0"/>
+              <a:rPr lang="da-DK" dirty="0"/>
               <a:t>BSS</a:t>
             </a:r>
-            <a:endParaRPr lang="da-DK" dirty="0"/>
           </a:p>
         </p:txBody>
       </p:sp>
@@ -6002,7 +5978,7 @@
             <a:fld id="{DCEB35B1-BC5C-4F24-B72D-591F5A33F1B4}" type="datetime5">
               <a:rPr lang="da-DK" smtClean="0"/>
               <a:pPr/>
-              <a:t>oktober 2025</a:t>
+              <a:t>maj 2026</a:t>
             </a:fld>
             <a:endParaRPr lang="da-DK" dirty="0"/>
           </a:p>
@@ -6048,20 +6024,20 @@
             <p:ph type="title"/>
           </p:nvPr>
         </p:nvSpPr>
-        <p:spPr/>
+        <p:spPr>
+          <a:xfrm>
+            <a:off x="719138" y="655604"/>
+            <a:ext cx="10660062" cy="743350"/>
+          </a:xfrm>
+        </p:spPr>
         <p:txBody>
           <a:bodyPr/>
           <a:lstStyle/>
           <a:p>
             <a:r>
-              <a:rPr lang="da-DK" dirty="0" smtClean="0"/>
-              <a:t>Link to </a:t>
-            </a:r>
-            <a:r>
-              <a:rPr lang="da-DK" dirty="0" err="1" smtClean="0"/>
-              <a:t>Github</a:t>
-            </a:r>
-            <a:endParaRPr lang="da-DK" dirty="0"/>
+              <a:rPr lang="en-US" dirty="0"/>
+              <a:t>Other ‘fun’ elements when coding in R</a:t>
+            </a:r>
           </a:p>
         </p:txBody>
       </p:sp>
@@ -6077,34 +6053,180 @@
         </p:nvSpPr>
         <p:spPr>
           <a:xfrm>
-            <a:off x="719138" y="1355559"/>
-            <a:ext cx="10748962" cy="3929242"/>
+            <a:off x="719139" y="1691014"/>
+            <a:ext cx="5555774" cy="4279939"/>
           </a:xfrm>
         </p:spPr>
         <p:txBody>
           <a:bodyPr/>
           <a:lstStyle/>
           <a:p>
-            <a:pPr marL="0" indent="0">
-              <a:buNone/>
+            <a:pPr>
+              <a:lnSpc>
+                <a:spcPct val="150000"/>
+              </a:lnSpc>
             </a:pPr>
             <a:r>
-              <a:rPr lang="da-DK" sz="3400" dirty="0">
-                <a:hlinkClick r:id="rId2"/>
-              </a:rPr>
-              <a:t>https://</a:t>
-            </a:r>
-            <a:r>
-              <a:rPr lang="da-DK" sz="3400" dirty="0" smtClean="0">
-                <a:hlinkClick r:id="rId2"/>
-              </a:rPr>
-              <a:t>github.com/AUL-BSS-Datalab/StatisticsIntroR.git</a:t>
-            </a:r>
-            <a:r>
-              <a:rPr lang="da-DK" sz="3400" dirty="0" smtClean="0"/>
-              <a:t> </a:t>
-            </a:r>
-            <a:endParaRPr lang="da-DK" sz="3400" dirty="0"/>
+              <a:rPr lang="da-DK" dirty="0"/>
+              <a:t>$ vs. [ ] vs. [[ ]]</a:t>
+            </a:r>
+          </a:p>
+          <a:p>
+            <a:pPr lvl="1">
+              <a:lnSpc>
+                <a:spcPct val="150000"/>
+              </a:lnSpc>
+            </a:pPr>
+            <a:r>
+              <a:rPr lang="en-US" dirty="0"/>
+              <a:t>The $ operator is used to extract a single column </a:t>
+            </a:r>
+            <a:r>
+              <a:rPr lang="en-US" u="sng" dirty="0"/>
+              <a:t>from</a:t>
+            </a:r>
+            <a:r>
+              <a:rPr lang="en-US" dirty="0"/>
+              <a:t> a data frame </a:t>
+            </a:r>
+            <a:r>
+              <a:rPr lang="en-US" u="sng" dirty="0"/>
+              <a:t>as</a:t>
+            </a:r>
+            <a:r>
+              <a:rPr lang="en-US" dirty="0"/>
+              <a:t> a vector.</a:t>
+            </a:r>
+          </a:p>
+          <a:p>
+            <a:pPr lvl="1">
+              <a:lnSpc>
+                <a:spcPct val="150000"/>
+              </a:lnSpc>
+            </a:pPr>
+            <a:r>
+              <a:rPr lang="en-US" dirty="0"/>
+              <a:t>The [ ] operator is used to extract a single column </a:t>
+            </a:r>
+            <a:r>
+              <a:rPr lang="en-US" u="sng" dirty="0"/>
+              <a:t>from</a:t>
+            </a:r>
+            <a:r>
+              <a:rPr lang="en-US" dirty="0"/>
+              <a:t> a data frame </a:t>
+            </a:r>
+            <a:r>
+              <a:rPr lang="en-US" u="sng" dirty="0"/>
+              <a:t>as</a:t>
+            </a:r>
+            <a:r>
+              <a:rPr lang="en-US" dirty="0"/>
+              <a:t> a data frame.</a:t>
+            </a:r>
+            <a:endParaRPr lang="da-DK" dirty="0"/>
+          </a:p>
+          <a:p>
+            <a:pPr lvl="1">
+              <a:lnSpc>
+                <a:spcPct val="150000"/>
+              </a:lnSpc>
+            </a:pPr>
+            <a:r>
+              <a:rPr lang="en-US" dirty="0"/>
+              <a:t>The [[ ]] operator is used to extract a single column </a:t>
+            </a:r>
+            <a:r>
+              <a:rPr lang="en-US" u="sng" dirty="0"/>
+              <a:t>from</a:t>
+            </a:r>
+            <a:r>
+              <a:rPr lang="en-US" dirty="0"/>
+              <a:t> a data frame </a:t>
+            </a:r>
+            <a:r>
+              <a:rPr lang="en-US" u="sng" dirty="0"/>
+              <a:t>as</a:t>
+            </a:r>
+            <a:r>
+              <a:rPr lang="en-US" dirty="0"/>
+              <a:t> a vector, but it can also be used to extract a single element </a:t>
+            </a:r>
+            <a:r>
+              <a:rPr lang="en-US" u="sng" dirty="0"/>
+              <a:t>from</a:t>
+            </a:r>
+            <a:r>
+              <a:rPr lang="en-US" dirty="0"/>
+              <a:t> a list.</a:t>
+            </a:r>
+          </a:p>
+          <a:p>
+            <a:pPr>
+              <a:lnSpc>
+                <a:spcPct val="150000"/>
+              </a:lnSpc>
+            </a:pPr>
+            <a:r>
+              <a:rPr lang="en-US" dirty="0"/>
+              <a:t>= vs. </a:t>
+            </a:r>
+            <a:r>
+              <a:rPr lang="en-US" dirty="0">
+                <a:sym typeface="Wingdings" panose="05000000000000000000" pitchFamily="2" charset="2"/>
+              </a:rPr>
+              <a:t> </a:t>
+            </a:r>
+          </a:p>
+          <a:p>
+            <a:pPr lvl="1">
+              <a:lnSpc>
+                <a:spcPct val="150000"/>
+              </a:lnSpc>
+            </a:pPr>
+            <a:r>
+              <a:rPr lang="en-US" dirty="0"/>
+              <a:t>In R, the </a:t>
+            </a:r>
+            <a:r>
+              <a:rPr lang="en-US" dirty="0">
+                <a:sym typeface="Wingdings" panose="05000000000000000000" pitchFamily="2" charset="2"/>
+              </a:rPr>
+              <a:t> </a:t>
+            </a:r>
+            <a:r>
+              <a:rPr lang="en-US" dirty="0"/>
+              <a:t>operator is used for assignment, while the = operator is used for both assignment and argument specification in functions.</a:t>
+            </a:r>
+          </a:p>
+          <a:p>
+            <a:pPr lvl="1">
+              <a:lnSpc>
+                <a:spcPct val="150000"/>
+              </a:lnSpc>
+            </a:pPr>
+            <a:r>
+              <a:rPr lang="en-US" dirty="0"/>
+              <a:t>Best practice is to use </a:t>
+            </a:r>
+            <a:r>
+              <a:rPr lang="en-US" dirty="0">
+                <a:sym typeface="Wingdings" panose="05000000000000000000" pitchFamily="2" charset="2"/>
+              </a:rPr>
+              <a:t></a:t>
+            </a:r>
+            <a:r>
+              <a:rPr lang="en-US" dirty="0"/>
+              <a:t> for assignment and = for argument specification in functions.</a:t>
+            </a:r>
+          </a:p>
+          <a:p>
+            <a:pPr lvl="1">
+              <a:lnSpc>
+                <a:spcPct val="150000"/>
+              </a:lnSpc>
+            </a:pPr>
+            <a:endParaRPr lang="da-DK" dirty="0"/>
           </a:p>
         </p:txBody>
       </p:sp>
@@ -6126,12 +6248,41 @@
             <a:fld id="{D975665A-61CB-4DAB-8750-5B97BD1810B6}" type="datetime5">
               <a:rPr lang="da-DK" smtClean="0"/>
               <a:pPr/>
-              <a:t>oktober 2025</a:t>
+              <a:t>maj 2026</a:t>
             </a:fld>
             <a:endParaRPr lang="da-DK" dirty="0"/>
           </a:p>
         </p:txBody>
       </p:sp>
+      <p:pic>
+        <p:nvPicPr>
+          <p:cNvPr id="5" name="Billede 4"/>
+          <p:cNvPicPr>
+            <a:picLocks noChangeAspect="1"/>
+          </p:cNvPicPr>
+          <p:nvPr/>
+        </p:nvPicPr>
+        <p:blipFill>
+          <a:blip r:embed="rId2"/>
+          <a:stretch>
+            <a:fillRect/>
+          </a:stretch>
+        </p:blipFill>
+        <p:spPr>
+          <a:xfrm>
+            <a:off x="6468785" y="1580518"/>
+            <a:ext cx="1190791" cy="295316"/>
+          </a:xfrm>
+          <a:prstGeom prst="rect">
+            <a:avLst/>
+          </a:prstGeom>
+          <a:ln w="12700">
+            <a:solidFill>
+              <a:schemeClr val="tx1"/>
+            </a:solidFill>
+          </a:ln>
+        </p:spPr>
+      </p:pic>
       <p:pic>
         <p:nvPicPr>
           <p:cNvPr id="6" name="Billede 5"/>
@@ -6148,18 +6299,339 @@
         </p:blipFill>
         <p:spPr>
           <a:xfrm>
-            <a:off x="4139406" y="2297256"/>
-            <a:ext cx="2987545" cy="2987545"/>
+            <a:off x="8164723" y="1604583"/>
+            <a:ext cx="3490437" cy="247186"/>
           </a:xfrm>
           <a:prstGeom prst="rect">
             <a:avLst/>
           </a:prstGeom>
-        </p:spPr>
+          <a:ln w="12700">
+            <a:solidFill>
+              <a:schemeClr val="tx1"/>
+            </a:solidFill>
+          </a:ln>
+        </p:spPr>
+      </p:pic>
+      <p:pic>
+        <p:nvPicPr>
+          <p:cNvPr id="8" name="Billede 7"/>
+          <p:cNvPicPr>
+            <a:picLocks noChangeAspect="1"/>
+          </p:cNvPicPr>
+          <p:nvPr/>
+        </p:nvPicPr>
+        <p:blipFill>
+          <a:blip r:embed="rId4"/>
+          <a:stretch>
+            <a:fillRect/>
+          </a:stretch>
+        </p:blipFill>
+        <p:spPr>
+          <a:xfrm>
+            <a:off x="6468785" y="2483965"/>
+            <a:ext cx="1152686" cy="209579"/>
+          </a:xfrm>
+          <a:prstGeom prst="rect">
+            <a:avLst/>
+          </a:prstGeom>
+        </p:spPr>
+        <p:style>
+          <a:lnRef idx="2">
+            <a:schemeClr val="dk1"/>
+          </a:lnRef>
+          <a:fillRef idx="1">
+            <a:schemeClr val="lt1"/>
+          </a:fillRef>
+          <a:effectRef idx="0">
+            <a:schemeClr val="dk1"/>
+          </a:effectRef>
+          <a:fontRef idx="minor">
+            <a:schemeClr val="dk1"/>
+          </a:fontRef>
+        </p:style>
+      </p:pic>
+      <p:pic>
+        <p:nvPicPr>
+          <p:cNvPr id="10" name="Billede 9"/>
+          <p:cNvPicPr>
+            <a:picLocks noChangeAspect="1"/>
+          </p:cNvPicPr>
+          <p:nvPr/>
+        </p:nvPicPr>
+        <p:blipFill>
+          <a:blip r:embed="rId5"/>
+          <a:stretch>
+            <a:fillRect/>
+          </a:stretch>
+        </p:blipFill>
+        <p:spPr>
+          <a:xfrm>
+            <a:off x="8164723" y="2057398"/>
+            <a:ext cx="1778882" cy="1411388"/>
+          </a:xfrm>
+          <a:prstGeom prst="rect">
+            <a:avLst/>
+          </a:prstGeom>
+          <a:ln w="12700">
+            <a:solidFill>
+              <a:schemeClr val="tx1"/>
+            </a:solidFill>
+          </a:ln>
+        </p:spPr>
+      </p:pic>
+      <p:pic>
+        <p:nvPicPr>
+          <p:cNvPr id="11" name="Billede 10"/>
+          <p:cNvPicPr>
+            <a:picLocks noChangeAspect="1"/>
+          </p:cNvPicPr>
+          <p:nvPr/>
+        </p:nvPicPr>
+        <p:blipFill>
+          <a:blip r:embed="rId6"/>
+          <a:stretch>
+            <a:fillRect/>
+          </a:stretch>
+        </p:blipFill>
+        <p:spPr>
+          <a:xfrm>
+            <a:off x="6468786" y="3731074"/>
+            <a:ext cx="1295581" cy="190527"/>
+          </a:xfrm>
+          <a:prstGeom prst="rect">
+            <a:avLst/>
+          </a:prstGeom>
+        </p:spPr>
+        <p:style>
+          <a:lnRef idx="2">
+            <a:schemeClr val="dk1"/>
+          </a:lnRef>
+          <a:fillRef idx="1">
+            <a:schemeClr val="lt1"/>
+          </a:fillRef>
+          <a:effectRef idx="0">
+            <a:schemeClr val="dk1"/>
+          </a:effectRef>
+          <a:fontRef idx="minor">
+            <a:schemeClr val="dk1"/>
+          </a:fontRef>
+        </p:style>
+      </p:pic>
+      <p:pic>
+        <p:nvPicPr>
+          <p:cNvPr id="12" name="Billede 11"/>
+          <p:cNvPicPr>
+            <a:picLocks noChangeAspect="1"/>
+          </p:cNvPicPr>
+          <p:nvPr/>
+        </p:nvPicPr>
+        <p:blipFill>
+          <a:blip r:embed="rId3"/>
+          <a:stretch>
+            <a:fillRect/>
+          </a:stretch>
+        </p:blipFill>
+        <p:spPr>
+          <a:xfrm>
+            <a:off x="8164723" y="3674415"/>
+            <a:ext cx="3490437" cy="247186"/>
+          </a:xfrm>
+          <a:prstGeom prst="rect">
+            <a:avLst/>
+          </a:prstGeom>
+          <a:ln w="12700">
+            <a:solidFill>
+              <a:schemeClr val="tx1"/>
+            </a:solidFill>
+          </a:ln>
+        </p:spPr>
+      </p:pic>
+      <p:sp>
+        <p:nvSpPr>
+          <p:cNvPr id="13" name="Højrepil 12"/>
+          <p:cNvSpPr/>
+          <p:nvPr/>
+        </p:nvSpPr>
+        <p:spPr>
+          <a:xfrm>
+            <a:off x="7763657" y="1700822"/>
+            <a:ext cx="296985" cy="54708"/>
+          </a:xfrm>
+          <a:prstGeom prst="rightArrow">
+            <a:avLst/>
+          </a:prstGeom>
+          <a:solidFill>
+            <a:schemeClr val="tx1"/>
+          </a:solidFill>
+          <a:ln>
+            <a:solidFill>
+              <a:schemeClr val="tx1"/>
+            </a:solidFill>
+          </a:ln>
+        </p:spPr>
+        <p:style>
+          <a:lnRef idx="2">
+            <a:schemeClr val="accent1">
+              <a:shade val="50000"/>
+            </a:schemeClr>
+          </a:lnRef>
+          <a:fillRef idx="1">
+            <a:schemeClr val="accent1"/>
+          </a:fillRef>
+          <a:effectRef idx="0">
+            <a:schemeClr val="accent1"/>
+          </a:effectRef>
+          <a:fontRef idx="minor">
+            <a:schemeClr val="lt1"/>
+          </a:fontRef>
+        </p:style>
+        <p:txBody>
+          <a:bodyPr rtlCol="0" anchor="ctr"/>
+          <a:lstStyle/>
+          <a:p>
+            <a:pPr algn="ctr"/>
+            <a:endParaRPr lang="da-DK" sz="2000" noProof="0" dirty="0" err="1"/>
+          </a:p>
+        </p:txBody>
+      </p:sp>
+      <p:sp>
+        <p:nvSpPr>
+          <p:cNvPr id="14" name="Højrepil 13"/>
+          <p:cNvSpPr/>
+          <p:nvPr/>
+        </p:nvSpPr>
+        <p:spPr>
+          <a:xfrm>
+            <a:off x="7763657" y="2561400"/>
+            <a:ext cx="296985" cy="54708"/>
+          </a:xfrm>
+          <a:prstGeom prst="rightArrow">
+            <a:avLst/>
+          </a:prstGeom>
+          <a:solidFill>
+            <a:schemeClr val="tx1"/>
+          </a:solidFill>
+          <a:ln>
+            <a:solidFill>
+              <a:schemeClr val="tx1"/>
+            </a:solidFill>
+          </a:ln>
+        </p:spPr>
+        <p:style>
+          <a:lnRef idx="2">
+            <a:schemeClr val="accent1">
+              <a:shade val="50000"/>
+            </a:schemeClr>
+          </a:lnRef>
+          <a:fillRef idx="1">
+            <a:schemeClr val="accent1"/>
+          </a:fillRef>
+          <a:effectRef idx="0">
+            <a:schemeClr val="accent1"/>
+          </a:effectRef>
+          <a:fontRef idx="minor">
+            <a:schemeClr val="lt1"/>
+          </a:fontRef>
+        </p:style>
+        <p:txBody>
+          <a:bodyPr rtlCol="0" anchor="ctr"/>
+          <a:lstStyle/>
+          <a:p>
+            <a:pPr algn="ctr"/>
+            <a:endParaRPr lang="da-DK" sz="2000" noProof="0" dirty="0" err="1"/>
+          </a:p>
+        </p:txBody>
+      </p:sp>
+      <p:sp>
+        <p:nvSpPr>
+          <p:cNvPr id="15" name="Højrepil 14"/>
+          <p:cNvSpPr/>
+          <p:nvPr/>
+        </p:nvSpPr>
+        <p:spPr>
+          <a:xfrm>
+            <a:off x="7816052" y="3772607"/>
+            <a:ext cx="296985" cy="54708"/>
+          </a:xfrm>
+          <a:prstGeom prst="rightArrow">
+            <a:avLst/>
+          </a:prstGeom>
+          <a:solidFill>
+            <a:schemeClr val="tx1"/>
+          </a:solidFill>
+          <a:ln>
+            <a:solidFill>
+              <a:schemeClr val="tx1"/>
+            </a:solidFill>
+          </a:ln>
+        </p:spPr>
+        <p:style>
+          <a:lnRef idx="2">
+            <a:schemeClr val="accent1">
+              <a:shade val="50000"/>
+            </a:schemeClr>
+          </a:lnRef>
+          <a:fillRef idx="1">
+            <a:schemeClr val="accent1"/>
+          </a:fillRef>
+          <a:effectRef idx="0">
+            <a:schemeClr val="accent1"/>
+          </a:effectRef>
+          <a:fontRef idx="minor">
+            <a:schemeClr val="lt1"/>
+          </a:fontRef>
+        </p:style>
+        <p:txBody>
+          <a:bodyPr rtlCol="0" anchor="ctr"/>
+          <a:lstStyle/>
+          <a:p>
+            <a:pPr algn="ctr"/>
+            <a:endParaRPr lang="da-DK" sz="2000" noProof="0" dirty="0" err="1"/>
+          </a:p>
+        </p:txBody>
+      </p:sp>
+      <p:pic>
+        <p:nvPicPr>
+          <p:cNvPr id="16" name="Billede 15"/>
+          <p:cNvPicPr>
+            <a:picLocks noChangeAspect="1"/>
+          </p:cNvPicPr>
+          <p:nvPr/>
+        </p:nvPicPr>
+        <p:blipFill>
+          <a:blip r:embed="rId7"/>
+          <a:stretch>
+            <a:fillRect/>
+          </a:stretch>
+        </p:blipFill>
+        <p:spPr>
+          <a:xfrm>
+            <a:off x="6417098" y="4591652"/>
+            <a:ext cx="5503327" cy="601457"/>
+          </a:xfrm>
+          <a:prstGeom prst="rect">
+            <a:avLst/>
+          </a:prstGeom>
+        </p:spPr>
+        <p:style>
+          <a:lnRef idx="2">
+            <a:schemeClr val="dk1"/>
+          </a:lnRef>
+          <a:fillRef idx="1">
+            <a:schemeClr val="lt1"/>
+          </a:fillRef>
+          <a:effectRef idx="0">
+            <a:schemeClr val="dk1"/>
+          </a:effectRef>
+          <a:fontRef idx="minor">
+            <a:schemeClr val="dk1"/>
+          </a:fontRef>
+        </p:style>
       </p:pic>
     </p:spTree>
     <p:extLst>
       <p:ext uri="{BB962C8B-B14F-4D97-AF65-F5344CB8AC3E}">
-        <p14:creationId xmlns:p14="http://schemas.microsoft.com/office/powerpoint/2010/main" val="3891280402"/>
+        <p14:creationId xmlns:p14="http://schemas.microsoft.com/office/powerpoint/2010/main" val="3430299236"/>
       </p:ext>
     </p:extLst>
   </p:cSld>
@@ -6202,10 +6674,9 @@
           <a:lstStyle/>
           <a:p>
             <a:r>
-              <a:rPr lang="da-DK" dirty="0" smtClean="0"/>
+              <a:rPr lang="da-DK" dirty="0"/>
               <a:t>Agenda</a:t>
             </a:r>
-            <a:endParaRPr lang="da-DK" dirty="0"/>
           </a:p>
         </p:txBody>
       </p:sp>
@@ -6235,7 +6706,7 @@
               </a:lnSpc>
             </a:pPr>
             <a:r>
-              <a:rPr lang="en-US" sz="1600" dirty="0" smtClean="0"/>
+              <a:rPr lang="en-US" sz="1600" dirty="0"/>
               <a:t>Purpose and Competencies</a:t>
             </a:r>
           </a:p>
@@ -6246,18 +6717,14 @@
               </a:lnSpc>
             </a:pPr>
             <a:r>
-              <a:rPr lang="en-US" sz="1600" dirty="0" smtClean="0"/>
-              <a:t>Introduction </a:t>
-            </a:r>
-            <a:r>
               <a:rPr lang="en-US" sz="1600" dirty="0"/>
-              <a:t>to </a:t>
-            </a:r>
-            <a:r>
-              <a:rPr lang="en-US" sz="1600" dirty="0" err="1" smtClean="0"/>
+              <a:t>Introduction to </a:t>
+            </a:r>
+            <a:r>
+              <a:rPr lang="en-US" sz="1600" dirty="0" err="1"/>
               <a:t>Rstudio</a:t>
             </a:r>
-            <a:endParaRPr lang="en-US" sz="1600" dirty="0" smtClean="0"/>
+            <a:endParaRPr lang="en-US" sz="1600" dirty="0"/>
           </a:p>
           <a:p>
             <a:pPr>
@@ -6266,10 +6733,9 @@
               </a:lnSpc>
             </a:pPr>
             <a:r>
-              <a:rPr lang="en-US" sz="1600" dirty="0" smtClean="0"/>
+              <a:rPr lang="en-US" sz="1600" dirty="0"/>
               <a:t>Introduction to R</a:t>
             </a:r>
-            <a:endParaRPr lang="en-US" sz="1600" dirty="0"/>
           </a:p>
           <a:p>
             <a:pPr>
@@ -6278,20 +6744,8 @@
               </a:lnSpc>
             </a:pPr>
             <a:r>
-              <a:rPr lang="en-US" sz="1600" dirty="0" smtClean="0"/>
-              <a:t>Download </a:t>
-            </a:r>
-            <a:r>
               <a:rPr lang="en-US" sz="1600" dirty="0"/>
-              <a:t>data on </a:t>
-            </a:r>
-            <a:r>
-              <a:rPr lang="en-US" sz="1600" dirty="0" smtClean="0"/>
-              <a:t>general </a:t>
-            </a:r>
-            <a:r>
-              <a:rPr lang="en-US" sz="1600" dirty="0"/>
-              <a:t>elections in Denmark</a:t>
+              <a:t>Data on elections in Denmark</a:t>
             </a:r>
           </a:p>
           <a:p>
@@ -6302,15 +6756,7 @@
             </a:pPr>
             <a:r>
               <a:rPr lang="en-US" sz="1600" dirty="0"/>
-              <a:t>Data p</a:t>
-            </a:r>
-            <a:r>
-              <a:rPr lang="en-US" sz="1600" dirty="0" smtClean="0"/>
-              <a:t>reparation </a:t>
-            </a:r>
-            <a:r>
-              <a:rPr lang="en-US" sz="1600" dirty="0"/>
-              <a:t>in R</a:t>
+              <a:t>Data preparation in R</a:t>
             </a:r>
           </a:p>
           <a:p>
@@ -6321,21 +6767,8 @@
             </a:pPr>
             <a:r>
               <a:rPr lang="en-US" sz="1600" dirty="0"/>
-              <a:t>Data a</a:t>
-            </a:r>
-            <a:r>
-              <a:rPr lang="en-US" sz="1600" dirty="0" smtClean="0"/>
-              <a:t>nalysis and </a:t>
-            </a:r>
-            <a:r>
-              <a:rPr lang="en-US" sz="1600" dirty="0"/>
-              <a:t>v</a:t>
-            </a:r>
-            <a:r>
-              <a:rPr lang="en-US" sz="1600" dirty="0" smtClean="0"/>
-              <a:t>isualization</a:t>
-            </a:r>
-            <a:endParaRPr lang="en-US" sz="1600" dirty="0"/>
+              <a:t>Data analysis and visualization</a:t>
+            </a:r>
           </a:p>
         </p:txBody>
       </p:sp>
@@ -6357,7 +6790,7 @@
             <a:fld id="{D975665A-61CB-4DAB-8750-5B97BD1810B6}" type="datetime5">
               <a:rPr lang="da-DK" smtClean="0"/>
               <a:pPr/>
-              <a:t>oktober 2025</a:t>
+              <a:t>maj 2026</a:t>
             </a:fld>
             <a:endParaRPr lang="da-DK" dirty="0"/>
           </a:p>
@@ -6446,34 +6879,13 @@
               <a:buChar char="―"/>
             </a:pPr>
             <a:r>
-              <a:rPr lang="en-US" sz="1600" dirty="0" smtClean="0">
+              <a:rPr lang="en-US" sz="1600" dirty="0">
                 <a:solidFill>
                   <a:prstClr val="black"/>
                 </a:solidFill>
               </a:rPr>
-              <a:t>Apply </a:t>
-            </a:r>
-            <a:r>
-              <a:rPr lang="en-US" sz="1600" dirty="0">
-                <a:solidFill>
-                  <a:prstClr val="black"/>
-                </a:solidFill>
-              </a:rPr>
-              <a:t>the programming language R for statistical calculations and data visualization</a:t>
-            </a:r>
-            <a:r>
-              <a:rPr lang="en-US" sz="1600" dirty="0" smtClean="0">
-                <a:solidFill>
-                  <a:prstClr val="black"/>
-                </a:solidFill>
-              </a:rPr>
-              <a:t>.</a:t>
-            </a:r>
-            <a:endParaRPr lang="en-US" sz="1600" dirty="0">
-              <a:solidFill>
-                <a:prstClr val="black"/>
-              </a:solidFill>
-            </a:endParaRPr>
+              <a:t>Apply the programming language R for statistical calculations and data visualization.</a:t>
+            </a:r>
           </a:p>
           <a:p>
             <a:pPr marL="252000" lvl="0" indent="-252000">
@@ -6484,12 +6896,20 @@
               <a:buChar char="―"/>
             </a:pPr>
             <a:r>
-              <a:rPr lang="en-US" sz="1600" dirty="0" smtClean="0">
+              <a:rPr lang="en-US" sz="1600" dirty="0">
                 <a:solidFill>
                   <a:prstClr val="black"/>
                 </a:solidFill>
               </a:rPr>
-              <a:t>Familiarity </a:t>
+              <a:t>Familiarity with the programming application </a:t>
+            </a:r>
+            <a:r>
+              <a:rPr lang="en-US" sz="1600" dirty="0" err="1">
+                <a:solidFill>
+                  <a:prstClr val="black"/>
+                </a:solidFill>
+              </a:rPr>
+              <a:t>RStudio</a:t>
             </a:r>
             <a:r>
               <a:rPr lang="en-US" sz="1600" dirty="0">
@@ -6497,25 +6917,9 @@
                   <a:prstClr val="black"/>
                 </a:solidFill>
               </a:rPr>
-              <a:t>with the programming application </a:t>
-            </a:r>
-            <a:r>
-              <a:rPr lang="en-US" sz="1600" dirty="0" err="1">
-                <a:solidFill>
-                  <a:prstClr val="black"/>
-                </a:solidFill>
-              </a:rPr>
-              <a:t>RStudio</a:t>
-            </a:r>
-            <a:r>
-              <a:rPr lang="en-US" sz="1600" dirty="0" smtClean="0">
-                <a:solidFill>
-                  <a:prstClr val="black"/>
-                </a:solidFill>
-              </a:rPr>
               <a:t>.</a:t>
             </a:r>
-            <a:endParaRPr lang="da-DK" sz="1600" dirty="0" smtClean="0">
+            <a:endParaRPr lang="da-DK" sz="1600" dirty="0">
               <a:solidFill>
                 <a:prstClr val="black"/>
               </a:solidFill>
@@ -6541,7 +6945,7 @@
             <a:fld id="{D975665A-61CB-4DAB-8750-5B97BD1810B6}" type="datetime5">
               <a:rPr lang="da-DK" smtClean="0"/>
               <a:pPr/>
-              <a:t>oktober 2025</a:t>
+              <a:t>maj 2026</a:t>
             </a:fld>
             <a:endParaRPr lang="da-DK" dirty="0"/>
           </a:p>
@@ -6567,7 +6971,7 @@
               <a:t>Purpose and </a:t>
             </a:r>
             <a:r>
-              <a:rPr lang="da-DK" dirty="0" err="1" smtClean="0"/>
+              <a:rPr lang="da-DK" dirty="0" err="1"/>
               <a:t>skills</a:t>
             </a:r>
             <a:endParaRPr lang="da-DK" dirty="0"/>
@@ -6608,13 +7012,6 @@
   <p:clrMapOvr>
     <a:masterClrMapping/>
   </p:clrMapOvr>
-  <p:timing>
-    <p:tnLst>
-      <p:par>
-        <p:cTn id="1" dur="indefinite" restart="never" nodeType="tmRoot"/>
-      </p:par>
-    </p:tnLst>
-  </p:timing>
 </p:sld>
 </file>
 
@@ -6656,10 +7053,9 @@
           <a:lstStyle/>
           <a:p>
             <a:r>
-              <a:rPr lang="da-DK" dirty="0" smtClean="0"/>
+              <a:rPr lang="da-DK" dirty="0"/>
               <a:t>Outputs from the workshop</a:t>
             </a:r>
-            <a:endParaRPr lang="da-DK" dirty="0"/>
           </a:p>
         </p:txBody>
       </p:sp>
@@ -6681,7 +7077,7 @@
             <a:fld id="{D975665A-61CB-4DAB-8750-5B97BD1810B6}" type="datetime5">
               <a:rPr lang="da-DK" smtClean="0"/>
               <a:pPr/>
-              <a:t>oktober 2025</a:t>
+              <a:t>maj 2026</a:t>
             </a:fld>
             <a:endParaRPr lang="da-DK" dirty="0"/>
           </a:p>
@@ -6794,7 +7190,7 @@
           <a:lstStyle/>
           <a:p>
             <a:r>
-              <a:rPr lang="da-DK" dirty="0" err="1" smtClean="0">
+              <a:rPr lang="da-DK" dirty="0" err="1">
                 <a:solidFill>
                   <a:schemeClr val="bg1"/>
                 </a:solidFill>
@@ -6802,7 +7198,7 @@
               <a:t>Introduction</a:t>
             </a:r>
             <a:r>
-              <a:rPr lang="da-DK" dirty="0" smtClean="0">
+              <a:rPr lang="da-DK" dirty="0">
                 <a:solidFill>
                   <a:schemeClr val="bg1"/>
                 </a:solidFill>
@@ -6810,7 +7206,7 @@
               <a:t> to R and </a:t>
             </a:r>
             <a:r>
-              <a:rPr lang="da-DK" dirty="0" err="1" smtClean="0">
+              <a:rPr lang="da-DK" dirty="0" err="1">
                 <a:solidFill>
                   <a:schemeClr val="bg1"/>
                 </a:solidFill>
@@ -6898,30 +7294,16 @@
                 </a:solidFill>
                 <a:hlinkClick r:id="rId2"/>
               </a:rPr>
-              <a:t>https://posit.co/download/rstudio-desktop</a:t>
-            </a:r>
-            <a:r>
-              <a:rPr lang="en-US" sz="1600" dirty="0" smtClean="0">
+              <a:t>https://posit.co/download/rstudio-desktop/</a:t>
+            </a:r>
+            <a:r>
+              <a:rPr lang="en-US" sz="1600" dirty="0">
                 <a:solidFill>
                   <a:schemeClr val="bg1"/>
                 </a:solidFill>
-                <a:hlinkClick r:id="rId2"/>
-              </a:rPr>
-              <a:t>/</a:t>
-            </a:r>
-            <a:r>
-              <a:rPr lang="en-US" sz="1600" dirty="0" smtClean="0">
-                <a:solidFill>
-                  <a:schemeClr val="bg1"/>
-                </a:solidFill>
               </a:rPr>
               <a:t> </a:t>
             </a:r>
-            <a:endParaRPr lang="en-US" sz="1600" dirty="0">
-              <a:solidFill>
-                <a:schemeClr val="bg1"/>
-              </a:solidFill>
-            </a:endParaRPr>
           </a:p>
           <a:p>
             <a:pPr marL="0" indent="0">
@@ -7059,19 +7441,10 @@
                 </a:solidFill>
                 <a:hlinkClick r:id="rId2"/>
               </a:rPr>
-              <a:t>https://posit.co/download/rstudio-desktop</a:t>
-            </a:r>
-            <a:r>
-              <a:rPr lang="en-US" sz="1600" dirty="0" smtClean="0">
-                <a:solidFill>
-                  <a:schemeClr val="bg1"/>
-                </a:solidFill>
-                <a:hlinkClick r:id="rId2"/>
-              </a:rPr>
-              <a:t>/</a:t>
-            </a:r>
-            <a:r>
-              <a:rPr lang="en-US" sz="1600" dirty="0" smtClean="0">
+              <a:t>https://posit.co/download/rstudio-desktop/</a:t>
+            </a:r>
+            <a:r>
+              <a:rPr lang="en-US" sz="1600" dirty="0">
                 <a:solidFill>
                   <a:schemeClr val="bg1"/>
                 </a:solidFill>
@@ -7096,426 +7469,10 @@
   <p:clrMapOvr>
     <a:masterClrMapping/>
   </p:clrMapOvr>
-  <p:timing>
-    <p:tnLst>
-      <p:par>
-        <p:cTn id="1" dur="indefinite" restart="never" nodeType="tmRoot"/>
-      </p:par>
-    </p:tnLst>
-  </p:timing>
 </p:sld>
 </file>
 
 <file path=ppt/slides/slide6.xml><?xml version="1.0" encoding="utf-8"?>
-<p:sld xmlns:a="http://schemas.openxmlformats.org/drawingml/2006/main" xmlns:r="http://schemas.openxmlformats.org/officeDocument/2006/relationships" xmlns:p="http://schemas.openxmlformats.org/presentationml/2006/main">
-  <p:cSld>
-    <p:spTree>
-      <p:nvGrpSpPr>
-        <p:cNvPr id="1" name=""/>
-        <p:cNvGrpSpPr/>
-        <p:nvPr/>
-      </p:nvGrpSpPr>
-      <p:grpSpPr>
-        <a:xfrm>
-          <a:off x="0" y="0"/>
-          <a:ext cx="0" cy="0"/>
-          <a:chOff x="0" y="0"/>
-          <a:chExt cx="0" cy="0"/>
-        </a:xfrm>
-      </p:grpSpPr>
-      <p:sp>
-        <p:nvSpPr>
-          <p:cNvPr id="4" name="Titel 3"/>
-          <p:cNvSpPr>
-            <a:spLocks noGrp="1"/>
-          </p:cNvSpPr>
-          <p:nvPr>
-            <p:ph type="title"/>
-          </p:nvPr>
-        </p:nvSpPr>
-        <p:spPr>
-          <a:xfrm>
-            <a:off x="719674" y="325503"/>
-            <a:ext cx="6840537" cy="666120"/>
-          </a:xfrm>
-        </p:spPr>
-        <p:txBody>
-          <a:bodyPr/>
-          <a:lstStyle/>
-          <a:p>
-            <a:r>
-              <a:rPr lang="da-DK" dirty="0" err="1" smtClean="0"/>
-              <a:t>Coding</a:t>
-            </a:r>
-            <a:r>
-              <a:rPr lang="da-DK" dirty="0" smtClean="0"/>
-              <a:t> basics in R</a:t>
-            </a:r>
-            <a:endParaRPr lang="da-DK" dirty="0"/>
-          </a:p>
-        </p:txBody>
-      </p:sp>
-      <p:sp>
-        <p:nvSpPr>
-          <p:cNvPr id="5" name="Pladsholder til tekst 4"/>
-          <p:cNvSpPr>
-            <a:spLocks noGrp="1"/>
-          </p:cNvSpPr>
-          <p:nvPr>
-            <p:ph type="body" sz="quarter" idx="13"/>
-          </p:nvPr>
-        </p:nvSpPr>
-        <p:spPr>
-          <a:xfrm>
-            <a:off x="719674" y="1035863"/>
-            <a:ext cx="10685387" cy="4530435"/>
-          </a:xfrm>
-        </p:spPr>
-        <p:txBody>
-          <a:bodyPr/>
-          <a:lstStyle/>
-          <a:p>
-            <a:pPr>
-              <a:lnSpc>
-                <a:spcPct val="150000"/>
-              </a:lnSpc>
-            </a:pPr>
-            <a:r>
-              <a:rPr lang="en-US" dirty="0" smtClean="0"/>
-              <a:t>R is basically just a calculator </a:t>
-            </a:r>
-          </a:p>
-          <a:p>
-            <a:pPr lvl="1">
-              <a:lnSpc>
-                <a:spcPct val="150000"/>
-              </a:lnSpc>
-            </a:pPr>
-            <a:r>
-              <a:rPr lang="en-US" dirty="0"/>
-              <a:t>You can use R to do basic math </a:t>
-            </a:r>
-            <a:r>
-              <a:rPr lang="en-US" dirty="0" smtClean="0"/>
-              <a:t>calculations (and use more advanced functions)</a:t>
-            </a:r>
-          </a:p>
-          <a:p>
-            <a:pPr marL="285750" indent="-285750">
-              <a:lnSpc>
-                <a:spcPct val="150000"/>
-              </a:lnSpc>
-              <a:buFont typeface="Arial" panose="020B0604020202020204" pitchFamily="34" charset="0"/>
-              <a:buChar char="—"/>
-            </a:pPr>
-            <a:r>
-              <a:rPr lang="en-US" dirty="0"/>
-              <a:t>A function is a collection of tasks we want R to do in order to get a specific result.</a:t>
-            </a:r>
-          </a:p>
-          <a:p>
-            <a:pPr marL="465750" lvl="1" indent="-285750">
-              <a:lnSpc>
-                <a:spcPct val="150000"/>
-              </a:lnSpc>
-              <a:buFont typeface="Arial" panose="020B0604020202020204" pitchFamily="34" charset="0"/>
-              <a:buChar char="—"/>
-            </a:pPr>
-            <a:r>
-              <a:rPr lang="en-US" dirty="0"/>
-              <a:t>Instead of clicking on different buttons we must write out these </a:t>
-            </a:r>
-            <a:r>
-              <a:rPr lang="en-US" dirty="0" smtClean="0"/>
-              <a:t>commandos</a:t>
-            </a:r>
-          </a:p>
-          <a:p>
-            <a:pPr marL="285750" indent="-285750">
-              <a:lnSpc>
-                <a:spcPct val="150000"/>
-              </a:lnSpc>
-              <a:buFont typeface="Arial" panose="020B0604020202020204" pitchFamily="34" charset="0"/>
-              <a:buChar char="—"/>
-            </a:pPr>
-            <a:r>
-              <a:rPr lang="en-US" dirty="0" smtClean="0"/>
-              <a:t>We </a:t>
-            </a:r>
-            <a:r>
-              <a:rPr lang="en-US" dirty="0"/>
-              <a:t>have access to simple functions in base R, but we will often install packages to get access to more advanced </a:t>
-            </a:r>
-            <a:r>
-              <a:rPr lang="en-US" dirty="0" smtClean="0"/>
-              <a:t>functions</a:t>
-            </a:r>
-          </a:p>
-          <a:p>
-            <a:pPr>
-              <a:lnSpc>
-                <a:spcPct val="150000"/>
-              </a:lnSpc>
-            </a:pPr>
-            <a:r>
-              <a:rPr lang="en-US" dirty="0">
-                <a:sym typeface="Wingdings" panose="05000000000000000000" pitchFamily="2" charset="2"/>
-              </a:rPr>
-              <a:t>When writing code in R, we follow a fixed syntax or structure</a:t>
-            </a:r>
-          </a:p>
-          <a:p>
-            <a:pPr lvl="1">
-              <a:lnSpc>
-                <a:spcPct val="150000"/>
-              </a:lnSpc>
-            </a:pPr>
-            <a:r>
-              <a:rPr lang="en-US" dirty="0">
-                <a:sym typeface="Wingdings" panose="05000000000000000000" pitchFamily="2" charset="2"/>
-              </a:rPr>
-              <a:t>We first specify the name of the function and then we specify the arguments: </a:t>
-            </a:r>
-            <a:endParaRPr lang="en-US" dirty="0"/>
-          </a:p>
-          <a:p>
-            <a:pPr>
-              <a:lnSpc>
-                <a:spcPct val="150000"/>
-              </a:lnSpc>
-            </a:pPr>
-            <a:r>
-              <a:rPr lang="en-US" dirty="0"/>
-              <a:t>You can create new objects with the assignment operator: </a:t>
-            </a:r>
-          </a:p>
-          <a:p>
-            <a:pPr>
-              <a:lnSpc>
-                <a:spcPct val="150000"/>
-              </a:lnSpc>
-            </a:pPr>
-            <a:r>
-              <a:rPr lang="en-US" dirty="0"/>
-              <a:t>Object names must start with a letter and can only contain letters, numbers, _ and </a:t>
-            </a:r>
-            <a:r>
-              <a:rPr lang="en-US" dirty="0" smtClean="0"/>
-              <a:t>.</a:t>
-            </a:r>
-          </a:p>
-          <a:p>
-            <a:pPr>
-              <a:lnSpc>
-                <a:spcPct val="150000"/>
-              </a:lnSpc>
-            </a:pPr>
-            <a:endParaRPr lang="en-US" dirty="0"/>
-          </a:p>
-          <a:p>
-            <a:pPr>
-              <a:lnSpc>
-                <a:spcPct val="150000"/>
-              </a:lnSpc>
-            </a:pPr>
-            <a:endParaRPr lang="en-US" dirty="0" smtClean="0"/>
-          </a:p>
-          <a:p>
-            <a:pPr>
-              <a:lnSpc>
-                <a:spcPct val="150000"/>
-              </a:lnSpc>
-            </a:pPr>
-            <a:endParaRPr lang="en-US" dirty="0" smtClean="0"/>
-          </a:p>
-          <a:p>
-            <a:pPr>
-              <a:lnSpc>
-                <a:spcPct val="150000"/>
-              </a:lnSpc>
-            </a:pPr>
-            <a:r>
-              <a:rPr lang="en-US" dirty="0" smtClean="0"/>
-              <a:t>We write our code in scripts so we can save, access, edit and run them later</a:t>
-            </a:r>
-          </a:p>
-          <a:p>
-            <a:pPr>
-              <a:lnSpc>
-                <a:spcPct val="150000"/>
-              </a:lnSpc>
-            </a:pPr>
-            <a:r>
-              <a:rPr lang="en-US" dirty="0" smtClean="0"/>
-              <a:t>You can write comments. </a:t>
-            </a:r>
-            <a:r>
-              <a:rPr lang="en-US" dirty="0"/>
-              <a:t>R will ignore any text after </a:t>
-            </a:r>
-            <a:r>
-              <a:rPr lang="en-US" dirty="0" smtClean="0"/>
-              <a:t># for that line</a:t>
-            </a:r>
-          </a:p>
-          <a:p>
-            <a:pPr>
-              <a:lnSpc>
-                <a:spcPct val="150000"/>
-              </a:lnSpc>
-            </a:pPr>
-            <a:r>
-              <a:rPr lang="en-US" dirty="0" smtClean="0"/>
-              <a:t>There are different types of data in R (e.g. logical, numeric, integer, character, factor)</a:t>
-            </a:r>
-          </a:p>
-          <a:p>
-            <a:pPr lvl="1">
-              <a:lnSpc>
-                <a:spcPct val="150000"/>
-              </a:lnSpc>
-            </a:pPr>
-            <a:r>
-              <a:rPr lang="en-US" dirty="0" smtClean="0"/>
-              <a:t>These can be stored in a vector, list, matrix or </a:t>
-            </a:r>
-            <a:r>
-              <a:rPr lang="en-US" dirty="0" err="1" smtClean="0"/>
-              <a:t>dataframe</a:t>
-            </a:r>
-            <a:r>
-              <a:rPr lang="en-US" dirty="0" smtClean="0"/>
-              <a:t> </a:t>
-            </a:r>
-          </a:p>
-          <a:p>
-            <a:pPr marL="0" indent="0">
-              <a:lnSpc>
-                <a:spcPct val="150000"/>
-              </a:lnSpc>
-              <a:buNone/>
-            </a:pPr>
-            <a:endParaRPr lang="en-US" dirty="0" smtClean="0"/>
-          </a:p>
-          <a:p>
-            <a:endParaRPr lang="en-US" dirty="0"/>
-          </a:p>
-        </p:txBody>
-      </p:sp>
-      <p:sp>
-        <p:nvSpPr>
-          <p:cNvPr id="3" name="Pladsholder til dato 2"/>
-          <p:cNvSpPr>
-            <a:spLocks noGrp="1"/>
-          </p:cNvSpPr>
-          <p:nvPr>
-            <p:ph type="dt" sz="half" idx="4294967295"/>
-          </p:nvPr>
-        </p:nvSpPr>
-        <p:spPr>
-          <a:xfrm>
-            <a:off x="9790113" y="6292850"/>
-            <a:ext cx="2401887" cy="180975"/>
-          </a:xfrm>
-        </p:spPr>
-        <p:txBody>
-          <a:bodyPr/>
-          <a:lstStyle/>
-          <a:p>
-            <a:fld id="{D975665A-61CB-4DAB-8750-5B97BD1810B6}" type="datetime5">
-              <a:rPr lang="da-DK" smtClean="0"/>
-              <a:pPr/>
-              <a:t>oktober 2025</a:t>
-            </a:fld>
-            <a:endParaRPr lang="da-DK" dirty="0"/>
-          </a:p>
-        </p:txBody>
-      </p:sp>
-      <p:pic>
-        <p:nvPicPr>
-          <p:cNvPr id="7" name="Billede 6"/>
-          <p:cNvPicPr>
-            <a:picLocks noChangeAspect="1"/>
-          </p:cNvPicPr>
-          <p:nvPr/>
-        </p:nvPicPr>
-        <p:blipFill>
-          <a:blip r:embed="rId2"/>
-          <a:stretch>
-            <a:fillRect/>
-          </a:stretch>
-        </p:blipFill>
-        <p:spPr>
-          <a:xfrm>
-            <a:off x="5246614" y="3150166"/>
-            <a:ext cx="1631505" cy="301828"/>
-          </a:xfrm>
-          <a:prstGeom prst="rect">
-            <a:avLst/>
-          </a:prstGeom>
-        </p:spPr>
-      </p:pic>
-      <p:pic>
-        <p:nvPicPr>
-          <p:cNvPr id="8" name="Billede 7"/>
-          <p:cNvPicPr>
-            <a:picLocks noChangeAspect="1"/>
-          </p:cNvPicPr>
-          <p:nvPr/>
-        </p:nvPicPr>
-        <p:blipFill>
-          <a:blip r:embed="rId3"/>
-          <a:stretch>
-            <a:fillRect/>
-          </a:stretch>
-        </p:blipFill>
-        <p:spPr>
-          <a:xfrm>
-            <a:off x="993044" y="3844341"/>
-            <a:ext cx="2570845" cy="653044"/>
-          </a:xfrm>
-          <a:prstGeom prst="rect">
-            <a:avLst/>
-          </a:prstGeom>
-        </p:spPr>
-      </p:pic>
-      <p:pic>
-        <p:nvPicPr>
-          <p:cNvPr id="9" name="Billede 8"/>
-          <p:cNvPicPr>
-            <a:picLocks noChangeAspect="1"/>
-          </p:cNvPicPr>
-          <p:nvPr/>
-        </p:nvPicPr>
-        <p:blipFill rotWithShape="1">
-          <a:blip r:embed="rId4"/>
-          <a:srcRect l="25628" r="1" b="6509"/>
-          <a:stretch/>
-        </p:blipFill>
-        <p:spPr>
-          <a:xfrm>
-            <a:off x="6840497" y="2810156"/>
-            <a:ext cx="2074629" cy="361332"/>
-          </a:xfrm>
-          <a:prstGeom prst="rect">
-            <a:avLst/>
-          </a:prstGeom>
-        </p:spPr>
-      </p:pic>
-    </p:spTree>
-    <p:extLst>
-      <p:ext uri="{BB962C8B-B14F-4D97-AF65-F5344CB8AC3E}">
-        <p14:creationId xmlns:p14="http://schemas.microsoft.com/office/powerpoint/2010/main" val="873138210"/>
-      </p:ext>
-    </p:extLst>
-  </p:cSld>
-  <p:clrMapOvr>
-    <a:masterClrMapping/>
-  </p:clrMapOvr>
-</p:sld>
-</file>
-
-<file path=ppt/slides/slide7.xml><?xml version="1.0" encoding="utf-8"?>
 <p:sld xmlns:a="http://schemas.openxmlformats.org/drawingml/2006/main" xmlns:r="http://schemas.openxmlformats.org/officeDocument/2006/relationships" xmlns:p="http://schemas.openxmlformats.org/presentationml/2006/main">
   <p:cSld>
     <p:spTree>
@@ -7548,10 +7505,50 @@
           <a:lstStyle/>
           <a:p>
             <a:r>
-              <a:rPr lang="en-US" dirty="0" smtClean="0"/>
-              <a:t>Packages in R</a:t>
-            </a:r>
-            <a:endParaRPr lang="en-US" sz="2400" dirty="0"/>
+              <a:rPr lang="da-DK" dirty="0"/>
+              <a:t>Link to </a:t>
+            </a:r>
+            <a:r>
+              <a:rPr lang="da-DK" dirty="0" err="1"/>
+              <a:t>Github</a:t>
+            </a:r>
+            <a:endParaRPr lang="da-DK" dirty="0"/>
+          </a:p>
+        </p:txBody>
+      </p:sp>
+      <p:sp>
+        <p:nvSpPr>
+          <p:cNvPr id="3" name="Pladsholder til tekst 2"/>
+          <p:cNvSpPr>
+            <a:spLocks noGrp="1"/>
+          </p:cNvSpPr>
+          <p:nvPr>
+            <p:ph type="body" sz="quarter" idx="13"/>
+          </p:nvPr>
+        </p:nvSpPr>
+        <p:spPr>
+          <a:xfrm>
+            <a:off x="719138" y="1355559"/>
+            <a:ext cx="10748962" cy="3929242"/>
+          </a:xfrm>
+        </p:spPr>
+        <p:txBody>
+          <a:bodyPr/>
+          <a:lstStyle/>
+          <a:p>
+            <a:pPr marL="0" indent="0">
+              <a:buNone/>
+            </a:pPr>
+            <a:r>
+              <a:rPr lang="da-DK" sz="3400" dirty="0">
+                <a:hlinkClick r:id="rId2"/>
+              </a:rPr>
+              <a:t>https://github.com/AUL-BSS-Datalab/StatisticsIntroR.git</a:t>
+            </a:r>
+            <a:r>
+              <a:rPr lang="da-DK" sz="3400" dirty="0"/>
+              <a:t> </a:t>
+            </a:r>
           </a:p>
         </p:txBody>
       </p:sp>
@@ -7573,7 +7570,488 @@
             <a:fld id="{D975665A-61CB-4DAB-8750-5B97BD1810B6}" type="datetime5">
               <a:rPr lang="da-DK" smtClean="0"/>
               <a:pPr/>
-              <a:t>oktober 2025</a:t>
+              <a:t>maj 2026</a:t>
+            </a:fld>
+            <a:endParaRPr lang="da-DK" dirty="0"/>
+          </a:p>
+        </p:txBody>
+      </p:sp>
+      <p:pic>
+        <p:nvPicPr>
+          <p:cNvPr id="6" name="Billede 5"/>
+          <p:cNvPicPr>
+            <a:picLocks noChangeAspect="1"/>
+          </p:cNvPicPr>
+          <p:nvPr/>
+        </p:nvPicPr>
+        <p:blipFill>
+          <a:blip r:embed="rId3"/>
+          <a:stretch>
+            <a:fillRect/>
+          </a:stretch>
+        </p:blipFill>
+        <p:spPr>
+          <a:xfrm>
+            <a:off x="4139406" y="2297256"/>
+            <a:ext cx="2987545" cy="2987545"/>
+          </a:xfrm>
+          <a:prstGeom prst="rect">
+            <a:avLst/>
+          </a:prstGeom>
+        </p:spPr>
+      </p:pic>
+    </p:spTree>
+    <p:extLst>
+      <p:ext uri="{BB962C8B-B14F-4D97-AF65-F5344CB8AC3E}">
+        <p14:creationId xmlns:p14="http://schemas.microsoft.com/office/powerpoint/2010/main" val="3891280402"/>
+      </p:ext>
+    </p:extLst>
+  </p:cSld>
+  <p:clrMapOvr>
+    <a:masterClrMapping/>
+  </p:clrMapOvr>
+</p:sld>
+</file>
+
+<file path=ppt/slides/slide7.xml><?xml version="1.0" encoding="utf-8"?>
+<p:sld xmlns:a="http://schemas.openxmlformats.org/drawingml/2006/main" xmlns:r="http://schemas.openxmlformats.org/officeDocument/2006/relationships" xmlns:p="http://schemas.openxmlformats.org/presentationml/2006/main">
+  <p:cSld>
+    <p:spTree>
+      <p:nvGrpSpPr>
+        <p:cNvPr id="1" name=""/>
+        <p:cNvGrpSpPr/>
+        <p:nvPr/>
+      </p:nvGrpSpPr>
+      <p:grpSpPr>
+        <a:xfrm>
+          <a:off x="0" y="0"/>
+          <a:ext cx="0" cy="0"/>
+          <a:chOff x="0" y="0"/>
+          <a:chExt cx="0" cy="0"/>
+        </a:xfrm>
+      </p:grpSpPr>
+      <p:sp>
+        <p:nvSpPr>
+          <p:cNvPr id="4" name="Titel 3"/>
+          <p:cNvSpPr>
+            <a:spLocks noGrp="1"/>
+          </p:cNvSpPr>
+          <p:nvPr>
+            <p:ph type="title"/>
+          </p:nvPr>
+        </p:nvSpPr>
+        <p:spPr>
+          <a:xfrm>
+            <a:off x="719674" y="325503"/>
+            <a:ext cx="6840537" cy="666120"/>
+          </a:xfrm>
+        </p:spPr>
+        <p:txBody>
+          <a:bodyPr/>
+          <a:lstStyle/>
+          <a:p>
+            <a:r>
+              <a:rPr lang="da-DK" dirty="0" err="1"/>
+              <a:t>Coding</a:t>
+            </a:r>
+            <a:r>
+              <a:rPr lang="da-DK" dirty="0"/>
+              <a:t> basics in R</a:t>
+            </a:r>
+          </a:p>
+        </p:txBody>
+      </p:sp>
+      <p:sp>
+        <p:nvSpPr>
+          <p:cNvPr id="5" name="Pladsholder til tekst 4"/>
+          <p:cNvSpPr>
+            <a:spLocks noGrp="1"/>
+          </p:cNvSpPr>
+          <p:nvPr>
+            <p:ph type="body" sz="quarter" idx="13"/>
+          </p:nvPr>
+        </p:nvSpPr>
+        <p:spPr>
+          <a:xfrm>
+            <a:off x="719674" y="1035863"/>
+            <a:ext cx="10685387" cy="4530435"/>
+          </a:xfrm>
+        </p:spPr>
+        <p:txBody>
+          <a:bodyPr/>
+          <a:lstStyle/>
+          <a:p>
+            <a:pPr>
+              <a:lnSpc>
+                <a:spcPct val="150000"/>
+              </a:lnSpc>
+            </a:pPr>
+            <a:r>
+              <a:rPr lang="en-US" dirty="0"/>
+              <a:t>R is basically just a calculator </a:t>
+            </a:r>
+          </a:p>
+          <a:p>
+            <a:pPr lvl="1">
+              <a:lnSpc>
+                <a:spcPct val="150000"/>
+              </a:lnSpc>
+            </a:pPr>
+            <a:r>
+              <a:rPr lang="en-US" dirty="0"/>
+              <a:t>You can use R to do basic math calculations (and use more advanced functions)</a:t>
+            </a:r>
+          </a:p>
+          <a:p>
+            <a:pPr marL="285750" indent="-285750">
+              <a:lnSpc>
+                <a:spcPct val="150000"/>
+              </a:lnSpc>
+              <a:buFont typeface="Arial" panose="020B0604020202020204" pitchFamily="34" charset="0"/>
+              <a:buChar char="—"/>
+            </a:pPr>
+            <a:r>
+              <a:rPr lang="en-US" dirty="0"/>
+              <a:t>A function is a collection of tasks we want R to do in order to get a specific result.</a:t>
+            </a:r>
+          </a:p>
+          <a:p>
+            <a:pPr marL="465750" lvl="1" indent="-285750">
+              <a:lnSpc>
+                <a:spcPct val="150000"/>
+              </a:lnSpc>
+              <a:buFont typeface="Arial" panose="020B0604020202020204" pitchFamily="34" charset="0"/>
+              <a:buChar char="—"/>
+            </a:pPr>
+            <a:r>
+              <a:rPr lang="en-US" dirty="0"/>
+              <a:t>Instead of clicking on different buttons we must write out these commandos</a:t>
+            </a:r>
+          </a:p>
+          <a:p>
+            <a:pPr marL="285750" indent="-285750">
+              <a:lnSpc>
+                <a:spcPct val="150000"/>
+              </a:lnSpc>
+              <a:buFont typeface="Arial" panose="020B0604020202020204" pitchFamily="34" charset="0"/>
+              <a:buChar char="—"/>
+            </a:pPr>
+            <a:r>
+              <a:rPr lang="en-US" dirty="0"/>
+              <a:t>We have access to simple functions in base R, but we will often install packages to get access to more advanced functions</a:t>
+            </a:r>
+          </a:p>
+          <a:p>
+            <a:pPr>
+              <a:lnSpc>
+                <a:spcPct val="150000"/>
+              </a:lnSpc>
+            </a:pPr>
+            <a:r>
+              <a:rPr lang="en-US" dirty="0">
+                <a:sym typeface="Wingdings" panose="05000000000000000000" pitchFamily="2" charset="2"/>
+              </a:rPr>
+              <a:t>When writing code in R, we follow a fixed syntax or structure</a:t>
+            </a:r>
+          </a:p>
+          <a:p>
+            <a:pPr lvl="1">
+              <a:lnSpc>
+                <a:spcPct val="150000"/>
+              </a:lnSpc>
+            </a:pPr>
+            <a:r>
+              <a:rPr lang="en-US" dirty="0">
+                <a:sym typeface="Wingdings" panose="05000000000000000000" pitchFamily="2" charset="2"/>
+              </a:rPr>
+              <a:t>We first specify the name of the function and then we specify the arguments: </a:t>
+            </a:r>
+            <a:endParaRPr lang="en-US" dirty="0"/>
+          </a:p>
+          <a:p>
+            <a:pPr>
+              <a:lnSpc>
+                <a:spcPct val="150000"/>
+              </a:lnSpc>
+            </a:pPr>
+            <a:r>
+              <a:rPr lang="en-US" dirty="0"/>
+              <a:t>You can create new objects with the assignment operator: </a:t>
+            </a:r>
+          </a:p>
+          <a:p>
+            <a:pPr>
+              <a:lnSpc>
+                <a:spcPct val="150000"/>
+              </a:lnSpc>
+            </a:pPr>
+            <a:r>
+              <a:rPr lang="en-US" dirty="0"/>
+              <a:t>Object names must start with a letter and can only contain letters, numbers, _ and .</a:t>
+            </a:r>
+          </a:p>
+          <a:p>
+            <a:pPr>
+              <a:lnSpc>
+                <a:spcPct val="150000"/>
+              </a:lnSpc>
+            </a:pPr>
+            <a:endParaRPr lang="en-US" dirty="0"/>
+          </a:p>
+          <a:p>
+            <a:pPr>
+              <a:lnSpc>
+                <a:spcPct val="150000"/>
+              </a:lnSpc>
+            </a:pPr>
+            <a:endParaRPr lang="en-US" dirty="0"/>
+          </a:p>
+          <a:p>
+            <a:pPr>
+              <a:lnSpc>
+                <a:spcPct val="150000"/>
+              </a:lnSpc>
+            </a:pPr>
+            <a:endParaRPr lang="en-US" dirty="0"/>
+          </a:p>
+          <a:p>
+            <a:pPr>
+              <a:lnSpc>
+                <a:spcPct val="150000"/>
+              </a:lnSpc>
+            </a:pPr>
+            <a:r>
+              <a:rPr lang="en-US" dirty="0"/>
+              <a:t>We write our code in scripts so we can save, access, edit and run them later</a:t>
+            </a:r>
+          </a:p>
+          <a:p>
+            <a:pPr>
+              <a:lnSpc>
+                <a:spcPct val="150000"/>
+              </a:lnSpc>
+            </a:pPr>
+            <a:r>
+              <a:rPr lang="en-US" dirty="0"/>
+              <a:t>You can write comments. R will ignore any text after # for that line</a:t>
+            </a:r>
+          </a:p>
+          <a:p>
+            <a:pPr>
+              <a:lnSpc>
+                <a:spcPct val="150000"/>
+              </a:lnSpc>
+            </a:pPr>
+            <a:r>
+              <a:rPr lang="en-US" dirty="0"/>
+              <a:t>There are different types of data in R (e.g. logical, numeric, integer, character, factor)</a:t>
+            </a:r>
+          </a:p>
+          <a:p>
+            <a:pPr lvl="1">
+              <a:lnSpc>
+                <a:spcPct val="150000"/>
+              </a:lnSpc>
+            </a:pPr>
+            <a:r>
+              <a:rPr lang="en-US" dirty="0"/>
+              <a:t>These can be stored in a vector, list, matrix or </a:t>
+            </a:r>
+            <a:r>
+              <a:rPr lang="en-US" dirty="0" err="1"/>
+              <a:t>dataframe</a:t>
+            </a:r>
+            <a:r>
+              <a:rPr lang="en-US" dirty="0"/>
+              <a:t> </a:t>
+            </a:r>
+          </a:p>
+          <a:p>
+            <a:pPr marL="0" indent="0">
+              <a:lnSpc>
+                <a:spcPct val="150000"/>
+              </a:lnSpc>
+              <a:buNone/>
+            </a:pPr>
+            <a:endParaRPr lang="en-US" dirty="0"/>
+          </a:p>
+          <a:p>
+            <a:endParaRPr lang="en-US" dirty="0"/>
+          </a:p>
+        </p:txBody>
+      </p:sp>
+      <p:sp>
+        <p:nvSpPr>
+          <p:cNvPr id="3" name="Pladsholder til dato 2"/>
+          <p:cNvSpPr>
+            <a:spLocks noGrp="1"/>
+          </p:cNvSpPr>
+          <p:nvPr>
+            <p:ph type="dt" sz="half" idx="4294967295"/>
+          </p:nvPr>
+        </p:nvSpPr>
+        <p:spPr>
+          <a:xfrm>
+            <a:off x="9790113" y="6292850"/>
+            <a:ext cx="2401887" cy="180975"/>
+          </a:xfrm>
+        </p:spPr>
+        <p:txBody>
+          <a:bodyPr/>
+          <a:lstStyle/>
+          <a:p>
+            <a:fld id="{D975665A-61CB-4DAB-8750-5B97BD1810B6}" type="datetime5">
+              <a:rPr lang="da-DK" smtClean="0"/>
+              <a:pPr/>
+              <a:t>maj 2026</a:t>
+            </a:fld>
+            <a:endParaRPr lang="da-DK" dirty="0"/>
+          </a:p>
+        </p:txBody>
+      </p:sp>
+      <p:pic>
+        <p:nvPicPr>
+          <p:cNvPr id="7" name="Billede 6"/>
+          <p:cNvPicPr>
+            <a:picLocks noChangeAspect="1"/>
+          </p:cNvPicPr>
+          <p:nvPr/>
+        </p:nvPicPr>
+        <p:blipFill>
+          <a:blip r:embed="rId2"/>
+          <a:stretch>
+            <a:fillRect/>
+          </a:stretch>
+        </p:blipFill>
+        <p:spPr>
+          <a:xfrm>
+            <a:off x="5246614" y="3150166"/>
+            <a:ext cx="1631505" cy="301828"/>
+          </a:xfrm>
+          <a:prstGeom prst="rect">
+            <a:avLst/>
+          </a:prstGeom>
+        </p:spPr>
+      </p:pic>
+      <p:pic>
+        <p:nvPicPr>
+          <p:cNvPr id="8" name="Billede 7"/>
+          <p:cNvPicPr>
+            <a:picLocks noChangeAspect="1"/>
+          </p:cNvPicPr>
+          <p:nvPr/>
+        </p:nvPicPr>
+        <p:blipFill>
+          <a:blip r:embed="rId3"/>
+          <a:stretch>
+            <a:fillRect/>
+          </a:stretch>
+        </p:blipFill>
+        <p:spPr>
+          <a:xfrm>
+            <a:off x="993044" y="3844341"/>
+            <a:ext cx="2570845" cy="653044"/>
+          </a:xfrm>
+          <a:prstGeom prst="rect">
+            <a:avLst/>
+          </a:prstGeom>
+        </p:spPr>
+      </p:pic>
+      <p:pic>
+        <p:nvPicPr>
+          <p:cNvPr id="9" name="Billede 8"/>
+          <p:cNvPicPr>
+            <a:picLocks noChangeAspect="1"/>
+          </p:cNvPicPr>
+          <p:nvPr/>
+        </p:nvPicPr>
+        <p:blipFill rotWithShape="1">
+          <a:blip r:embed="rId4"/>
+          <a:srcRect l="25628" r="1" b="6509"/>
+          <a:stretch/>
+        </p:blipFill>
+        <p:spPr>
+          <a:xfrm>
+            <a:off x="6840497" y="2810156"/>
+            <a:ext cx="2074629" cy="361332"/>
+          </a:xfrm>
+          <a:prstGeom prst="rect">
+            <a:avLst/>
+          </a:prstGeom>
+        </p:spPr>
+      </p:pic>
+    </p:spTree>
+    <p:extLst>
+      <p:ext uri="{BB962C8B-B14F-4D97-AF65-F5344CB8AC3E}">
+        <p14:creationId xmlns:p14="http://schemas.microsoft.com/office/powerpoint/2010/main" val="873138210"/>
+      </p:ext>
+    </p:extLst>
+  </p:cSld>
+  <p:clrMapOvr>
+    <a:masterClrMapping/>
+  </p:clrMapOvr>
+</p:sld>
+</file>
+
+<file path=ppt/slides/slide8.xml><?xml version="1.0" encoding="utf-8"?>
+<p:sld xmlns:a="http://schemas.openxmlformats.org/drawingml/2006/main" xmlns:r="http://schemas.openxmlformats.org/officeDocument/2006/relationships" xmlns:p="http://schemas.openxmlformats.org/presentationml/2006/main">
+  <p:cSld>
+    <p:spTree>
+      <p:nvGrpSpPr>
+        <p:cNvPr id="1" name=""/>
+        <p:cNvGrpSpPr/>
+        <p:nvPr/>
+      </p:nvGrpSpPr>
+      <p:grpSpPr>
+        <a:xfrm>
+          <a:off x="0" y="0"/>
+          <a:ext cx="0" cy="0"/>
+          <a:chOff x="0" y="0"/>
+          <a:chExt cx="0" cy="0"/>
+        </a:xfrm>
+      </p:grpSpPr>
+      <p:sp>
+        <p:nvSpPr>
+          <p:cNvPr id="2" name="Titel 1"/>
+          <p:cNvSpPr>
+            <a:spLocks noGrp="1"/>
+          </p:cNvSpPr>
+          <p:nvPr>
+            <p:ph type="title"/>
+          </p:nvPr>
+        </p:nvSpPr>
+        <p:spPr/>
+        <p:txBody>
+          <a:bodyPr/>
+          <a:lstStyle/>
+          <a:p>
+            <a:r>
+              <a:rPr lang="en-US" dirty="0"/>
+              <a:t>Packages in R</a:t>
+            </a:r>
+            <a:endParaRPr lang="en-US" sz="2400" dirty="0"/>
+          </a:p>
+        </p:txBody>
+      </p:sp>
+      <p:sp>
+        <p:nvSpPr>
+          <p:cNvPr id="4" name="Pladsholder til dato 3"/>
+          <p:cNvSpPr>
+            <a:spLocks noGrp="1"/>
+          </p:cNvSpPr>
+          <p:nvPr>
+            <p:ph type="dt" sz="half" idx="14"/>
+          </p:nvPr>
+        </p:nvSpPr>
+        <p:spPr/>
+        <p:txBody>
+          <a:bodyPr/>
+          <a:lstStyle/>
+          <a:p>
+            <a:fld id="{D975665A-61CB-4DAB-8750-5B97BD1810B6}" type="datetime5">
+              <a:rPr lang="da-DK" smtClean="0"/>
+              <a:pPr/>
+              <a:t>maj 2026</a:t>
             </a:fld>
             <a:endParaRPr lang="da-DK" dirty="0"/>
           </a:p>
@@ -7635,7 +8113,7 @@
             <a:lstStyle/>
             <a:p>
               <a:pPr algn="ctr"/>
-              <a:endParaRPr lang="da-DK" sz="2000" noProof="0" dirty="0" err="1" smtClean="0"/>
+              <a:endParaRPr lang="da-DK" sz="2000" noProof="0" dirty="0" err="1"/>
             </a:p>
           </p:txBody>
         </p:sp>
@@ -7684,7 +8162,6 @@
                 <a:rPr lang="en-US" sz="1300" dirty="0"/>
                 <a:t>Like Sims – the expansion packs adds functionality to the base game </a:t>
               </a:r>
-              <a:endParaRPr lang="en-US" sz="1300" dirty="0" smtClean="0"/>
             </a:p>
             <a:p>
               <a:pPr marL="285750" indent="-285750">
@@ -7695,33 +8172,8 @@
                 <a:buChar char="•"/>
               </a:pPr>
               <a:r>
-                <a:rPr lang="en-US" sz="1300" dirty="0" smtClean="0"/>
-                <a:t>Packages </a:t>
-              </a:r>
-              <a:r>
                 <a:rPr lang="en-US" sz="1300" dirty="0"/>
-                <a:t>contains extra functions </a:t>
-              </a:r>
-            </a:p>
-            <a:p>
-              <a:pPr marL="285750" indent="-285750">
-                <a:lnSpc>
-                  <a:spcPct val="150000"/>
-                </a:lnSpc>
-                <a:buFont typeface="Arial" panose="020B0604020202020204" pitchFamily="34" charset="0"/>
-                <a:buChar char="•"/>
-              </a:pPr>
-              <a:r>
-                <a:rPr lang="en-US" sz="1300" dirty="0" smtClean="0"/>
-                <a:t>Ode </a:t>
-              </a:r>
-              <a:r>
-                <a:rPr lang="en-US" sz="1300" dirty="0"/>
-                <a:t>to the nerds (</a:t>
-              </a:r>
-              <a:r>
-                <a:rPr lang="en-US" sz="1300" dirty="0" smtClean="0"/>
-                <a:t>Open source) </a:t>
+                <a:t>Packages contains extra functions </a:t>
               </a:r>
             </a:p>
             <a:p>
@@ -7734,23 +8186,20 @@
               </a:pPr>
               <a:r>
                 <a:rPr lang="en-US" sz="1300" dirty="0"/>
-                <a:t>N</a:t>
+                <a:t>Ode to the nerds (Open source) </a:t>
               </a:r>
-              <a:r>
-                <a:rPr lang="en-US" sz="1300" dirty="0" smtClean="0"/>
-                <a:t>ot </a:t>
-              </a:r>
+            </a:p>
+            <a:p>
+              <a:pPr marL="285750" indent="-285750">
+                <a:lnSpc>
+                  <a:spcPct val="150000"/>
+                </a:lnSpc>
+                <a:buFont typeface="Arial" panose="020B0604020202020204" pitchFamily="34" charset="0"/>
+                <a:buChar char="•"/>
+              </a:pPr>
               <a:r>
                 <a:rPr lang="en-US" sz="1300" dirty="0"/>
-                <a:t>one way </a:t>
-              </a:r>
-              <a:r>
-                <a:rPr lang="en-US" sz="1300" dirty="0" smtClean="0"/>
-                <a:t>to the goal but </a:t>
-              </a:r>
-              <a:r>
-                <a:rPr lang="en-US" sz="1300" dirty="0"/>
-                <a:t>plenty </a:t>
+                <a:t>Not one way to the goal but plenty </a:t>
               </a:r>
             </a:p>
           </p:txBody>
@@ -7831,7 +8280,7 @@
               </a:lnSpc>
             </a:pPr>
             <a:r>
-              <a:rPr lang="en-US" dirty="0" smtClean="0">
+              <a:rPr lang="en-US" dirty="0">
                 <a:sym typeface="Wingdings" panose="05000000000000000000" pitchFamily="2" charset="2"/>
               </a:rPr>
               <a:t>R is an open source programming language</a:t>
@@ -7844,7 +8293,7 @@
               </a:lnSpc>
             </a:pPr>
             <a:r>
-              <a:rPr lang="en-US" dirty="0" smtClean="0">
+              <a:rPr lang="en-US" dirty="0">
                 <a:sym typeface="Wingdings" panose="05000000000000000000" pitchFamily="2" charset="2"/>
               </a:rPr>
               <a:t>We must install a package to get access to the functions inside it</a:t>
@@ -7857,7 +8306,7 @@
               </a:lnSpc>
             </a:pPr>
             <a:r>
-              <a:rPr lang="en-US" dirty="0" smtClean="0">
+              <a:rPr lang="en-US" dirty="0">
                 <a:sym typeface="Wingdings" panose="05000000000000000000" pitchFamily="2" charset="2"/>
               </a:rPr>
               <a:t>We only have to install the package once, but we must load the package into the script every time we want to use it </a:t>
@@ -7869,7 +8318,7 @@
                 <a:spcPct val="150000"/>
               </a:lnSpc>
             </a:pPr>
-            <a:endParaRPr lang="en-US" dirty="0" smtClean="0">
+            <a:endParaRPr lang="en-US" dirty="0">
               <a:sym typeface="Wingdings" panose="05000000000000000000" pitchFamily="2" charset="2"/>
             </a:endParaRPr>
           </a:p>
@@ -7888,7 +8337,7 @@
                 <a:spcPct val="150000"/>
               </a:lnSpc>
             </a:pPr>
-            <a:endParaRPr lang="en-US" dirty="0" smtClean="0">
+            <a:endParaRPr lang="en-US" dirty="0">
               <a:sym typeface="Wingdings" panose="05000000000000000000" pitchFamily="2" charset="2"/>
             </a:endParaRPr>
           </a:p>
@@ -7907,17 +8356,10 @@
   <p:clrMapOvr>
     <a:masterClrMapping/>
   </p:clrMapOvr>
-  <p:timing>
-    <p:tnLst>
-      <p:par>
-        <p:cTn id="1" dur="indefinite" restart="never" nodeType="tmRoot"/>
-      </p:par>
-    </p:tnLst>
-  </p:timing>
 </p:sld>
 </file>
 
-<file path=ppt/slides/slide8.xml><?xml version="1.0" encoding="utf-8"?>
+<file path=ppt/slides/slide9.xml><?xml version="1.0" encoding="utf-8"?>
 <p:sld xmlns:a="http://schemas.openxmlformats.org/drawingml/2006/main" xmlns:r="http://schemas.openxmlformats.org/officeDocument/2006/relationships" xmlns:p="http://schemas.openxmlformats.org/presentationml/2006/main">
   <p:cSld>
     <p:spTree>
@@ -7950,23 +8392,23 @@
           <a:lstStyle/>
           <a:p>
             <a:r>
-              <a:rPr lang="da-DK" dirty="0" err="1" smtClean="0"/>
+              <a:rPr lang="da-DK" dirty="0" err="1"/>
               <a:t>Why</a:t>
             </a:r>
             <a:r>
-              <a:rPr lang="da-DK" dirty="0" smtClean="0"/>
+              <a:rPr lang="da-DK" dirty="0"/>
               <a:t> </a:t>
             </a:r>
             <a:r>
-              <a:rPr lang="da-DK" dirty="0" err="1" smtClean="0"/>
+              <a:rPr lang="da-DK" dirty="0" err="1"/>
               <a:t>use</a:t>
             </a:r>
             <a:r>
-              <a:rPr lang="da-DK" dirty="0" smtClean="0"/>
+              <a:rPr lang="da-DK" dirty="0"/>
               <a:t> </a:t>
             </a:r>
             <a:r>
-              <a:rPr lang="da-DK" dirty="0" err="1" smtClean="0"/>
+              <a:rPr lang="da-DK" dirty="0" err="1"/>
               <a:t>pipes</a:t>
             </a:r>
             <a:endParaRPr lang="da-DK" dirty="0"/>
@@ -8000,11 +8442,7 @@
             </a:pPr>
             <a:r>
               <a:rPr lang="en-US" dirty="0"/>
-              <a:t>The pipe operator is used to pass the output of one function as the input to another </a:t>
-            </a:r>
-            <a:r>
-              <a:rPr lang="en-US" dirty="0" smtClean="0"/>
-              <a:t>function</a:t>
+              <a:t>The pipe operator is used to pass the output of one function as the input to another function</a:t>
             </a:r>
           </a:p>
           <a:p>
@@ -8014,16 +8452,8 @@
               </a:lnSpc>
             </a:pPr>
             <a:r>
-              <a:rPr lang="en-US" dirty="0" smtClean="0"/>
-              <a:t>It </a:t>
-            </a:r>
-            <a:r>
               <a:rPr lang="en-US" dirty="0"/>
-              <a:t>is used to chain multiple functions together in a readable </a:t>
-            </a:r>
-            <a:r>
-              <a:rPr lang="en-US" dirty="0" smtClean="0"/>
-              <a:t>way</a:t>
+              <a:t>It is used to chain multiple functions together in a readable way</a:t>
             </a:r>
           </a:p>
           <a:p>
@@ -8033,16 +8463,8 @@
               </a:lnSpc>
             </a:pPr>
             <a:r>
-              <a:rPr lang="en-US" dirty="0" smtClean="0"/>
-              <a:t>It </a:t>
-            </a:r>
-            <a:r>
               <a:rPr lang="en-US" dirty="0"/>
-              <a:t>is used to avoid nested functions and make code more </a:t>
-            </a:r>
-            <a:r>
-              <a:rPr lang="en-US" dirty="0" smtClean="0"/>
-              <a:t>readable</a:t>
+              <a:t>It is used to avoid nested functions and make code more readable</a:t>
             </a:r>
           </a:p>
           <a:p>
@@ -8052,16 +8474,8 @@
               </a:lnSpc>
             </a:pPr>
             <a:r>
-              <a:rPr lang="en-US" dirty="0" smtClean="0"/>
-              <a:t>It </a:t>
-            </a:r>
-            <a:r>
               <a:rPr lang="en-US" dirty="0"/>
-              <a:t>is used to avoid intermediate variables and make code more </a:t>
-            </a:r>
-            <a:r>
-              <a:rPr lang="en-US" dirty="0" smtClean="0"/>
-              <a:t>readable</a:t>
+              <a:t>It is used to avoid intermediate variables and make code more readable</a:t>
             </a:r>
           </a:p>
           <a:p>
@@ -8078,7 +8492,7 @@
                 <a:spcPct val="150000"/>
               </a:lnSpc>
             </a:pPr>
-            <a:endParaRPr lang="en-US" dirty="0" smtClean="0"/>
+            <a:endParaRPr lang="en-US" dirty="0"/>
           </a:p>
         </p:txBody>
       </p:sp>
@@ -8100,7 +8514,7 @@
             <a:fld id="{D975665A-61CB-4DAB-8750-5B97BD1810B6}" type="datetime5">
               <a:rPr lang="da-DK" smtClean="0"/>
               <a:pPr/>
-              <a:t>oktober 2025</a:t>
+              <a:t>maj 2026</a:t>
             </a:fld>
             <a:endParaRPr lang="da-DK" dirty="0"/>
           </a:p>
@@ -8187,10 +8601,10 @@
           <a:lstStyle/>
           <a:p>
             <a:r>
-              <a:rPr lang="da-DK" sz="5400" dirty="0" smtClean="0"/>
+              <a:rPr lang="da-DK" sz="5400" dirty="0"/>
               <a:t>=</a:t>
             </a:r>
-            <a:endParaRPr lang="da-DK" sz="2000" dirty="0" smtClean="0"/>
+            <a:endParaRPr lang="da-DK" sz="2000" dirty="0"/>
           </a:p>
         </p:txBody>
       </p:sp>
@@ -8217,33 +8631,25 @@
           <a:lstStyle/>
           <a:p>
             <a:r>
-              <a:rPr lang="da-DK" sz="2000" dirty="0" smtClean="0"/>
+              <a:rPr lang="da-DK" sz="2000" dirty="0"/>
               <a:t>dataset %&gt;%</a:t>
             </a:r>
           </a:p>
           <a:p>
             <a:r>
               <a:rPr lang="da-DK" sz="2000" dirty="0"/>
-              <a:t>	</a:t>
-            </a:r>
-            <a:r>
-              <a:rPr lang="da-DK" sz="2000" dirty="0" smtClean="0"/>
-              <a:t>a %&gt;%</a:t>
+              <a:t>	a %&gt;%</a:t>
             </a:r>
           </a:p>
           <a:p>
             <a:r>
               <a:rPr lang="da-DK" sz="2000" dirty="0"/>
-              <a:t>	</a:t>
-            </a:r>
-            <a:r>
-              <a:rPr lang="da-DK" sz="2000" dirty="0" smtClean="0"/>
-              <a:t>b %&gt;%</a:t>
-            </a:r>
-          </a:p>
-          <a:p>
-            <a:r>
-              <a:rPr lang="da-DK" sz="2000" dirty="0" smtClean="0"/>
+              <a:t>	b %&gt;%</a:t>
+            </a:r>
+          </a:p>
+          <a:p>
+            <a:r>
+              <a:rPr lang="da-DK" sz="2000" dirty="0"/>
               <a:t>	c</a:t>
             </a:r>
           </a:p>
@@ -8272,40 +8678,34 @@
           <a:p>
             <a:r>
               <a:rPr lang="da-DK" sz="2000" dirty="0"/>
-              <a:t>In </a:t>
-            </a:r>
-            <a:r>
-              <a:rPr lang="da-DK" sz="2000" dirty="0" smtClean="0"/>
-              <a:t>the:</a:t>
-            </a:r>
-            <a:endParaRPr lang="da-DK" sz="2000" dirty="0"/>
-          </a:p>
-          <a:p>
-            <a:r>
-              <a:rPr lang="da-DK" sz="2000" dirty="0" smtClean="0"/>
+              <a:t>In the:</a:t>
+            </a:r>
+          </a:p>
+          <a:p>
+            <a:r>
+              <a:rPr lang="da-DK" sz="2000" dirty="0"/>
               <a:t>First do:</a:t>
             </a:r>
           </a:p>
           <a:p>
             <a:r>
-              <a:rPr lang="da-DK" sz="2000" dirty="0" err="1" smtClean="0"/>
+              <a:rPr lang="da-DK" sz="2000" dirty="0" err="1"/>
               <a:t>Then</a:t>
             </a:r>
             <a:r>
-              <a:rPr lang="da-DK" sz="2000" dirty="0" smtClean="0"/>
+              <a:rPr lang="da-DK" sz="2000" dirty="0"/>
               <a:t> do:</a:t>
             </a:r>
           </a:p>
           <a:p>
             <a:r>
-              <a:rPr lang="da-DK" sz="2000" dirty="0" err="1" smtClean="0"/>
+              <a:rPr lang="da-DK" sz="2000" dirty="0" err="1"/>
               <a:t>Then</a:t>
             </a:r>
             <a:r>
-              <a:rPr lang="da-DK" sz="2000" dirty="0" smtClean="0"/>
+              <a:rPr lang="da-DK" sz="2000" dirty="0"/>
               <a:t> do:</a:t>
             </a:r>
-            <a:endParaRPr lang="da-DK" sz="2000" dirty="0"/>
           </a:p>
         </p:txBody>
       </p:sp>
@@ -8319,702 +8719,6 @@
   <p:clrMapOvr>
     <a:masterClrMapping/>
   </p:clrMapOvr>
-  <p:timing>
-    <p:tnLst>
-      <p:par>
-        <p:cTn id="1" dur="indefinite" restart="never" nodeType="tmRoot"/>
-      </p:par>
-    </p:tnLst>
-  </p:timing>
-</p:sld>
-</file>
-
-<file path=ppt/slides/slide9.xml><?xml version="1.0" encoding="utf-8"?>
-<p:sld xmlns:a="http://schemas.openxmlformats.org/drawingml/2006/main" xmlns:r="http://schemas.openxmlformats.org/officeDocument/2006/relationships" xmlns:p="http://schemas.openxmlformats.org/presentationml/2006/main">
-  <p:cSld>
-    <p:spTree>
-      <p:nvGrpSpPr>
-        <p:cNvPr id="1" name=""/>
-        <p:cNvGrpSpPr/>
-        <p:nvPr/>
-      </p:nvGrpSpPr>
-      <p:grpSpPr>
-        <a:xfrm>
-          <a:off x="0" y="0"/>
-          <a:ext cx="0" cy="0"/>
-          <a:chOff x="0" y="0"/>
-          <a:chExt cx="0" cy="0"/>
-        </a:xfrm>
-      </p:grpSpPr>
-      <p:sp>
-        <p:nvSpPr>
-          <p:cNvPr id="2" name="Titel 1"/>
-          <p:cNvSpPr>
-            <a:spLocks noGrp="1"/>
-          </p:cNvSpPr>
-          <p:nvPr>
-            <p:ph type="title"/>
-          </p:nvPr>
-        </p:nvSpPr>
-        <p:spPr>
-          <a:xfrm>
-            <a:off x="719138" y="655604"/>
-            <a:ext cx="10660062" cy="743350"/>
-          </a:xfrm>
-        </p:spPr>
-        <p:txBody>
-          <a:bodyPr/>
-          <a:lstStyle/>
-          <a:p>
-            <a:r>
-              <a:rPr lang="en-US" dirty="0" smtClean="0"/>
-              <a:t>Other ‘fun’ elements when coding in R</a:t>
-            </a:r>
-            <a:endParaRPr lang="en-US" dirty="0"/>
-          </a:p>
-        </p:txBody>
-      </p:sp>
-      <p:sp>
-        <p:nvSpPr>
-          <p:cNvPr id="3" name="Pladsholder til tekst 2"/>
-          <p:cNvSpPr>
-            <a:spLocks noGrp="1"/>
-          </p:cNvSpPr>
-          <p:nvPr>
-            <p:ph type="body" sz="quarter" idx="13"/>
-          </p:nvPr>
-        </p:nvSpPr>
-        <p:spPr>
-          <a:xfrm>
-            <a:off x="719139" y="1691014"/>
-            <a:ext cx="5555774" cy="4279939"/>
-          </a:xfrm>
-        </p:spPr>
-        <p:txBody>
-          <a:bodyPr/>
-          <a:lstStyle/>
-          <a:p>
-            <a:pPr>
-              <a:lnSpc>
-                <a:spcPct val="150000"/>
-              </a:lnSpc>
-            </a:pPr>
-            <a:r>
-              <a:rPr lang="da-DK" dirty="0" smtClean="0"/>
-              <a:t>$ vs. [ ] vs. [[ ]]</a:t>
-            </a:r>
-          </a:p>
-          <a:p>
-            <a:pPr lvl="1">
-              <a:lnSpc>
-                <a:spcPct val="150000"/>
-              </a:lnSpc>
-            </a:pPr>
-            <a:r>
-              <a:rPr lang="en-US" dirty="0"/>
-              <a:t>The $ operator is used to extract a single column </a:t>
-            </a:r>
-            <a:r>
-              <a:rPr lang="en-US" u="sng" dirty="0"/>
-              <a:t>from</a:t>
-            </a:r>
-            <a:r>
-              <a:rPr lang="en-US" dirty="0"/>
-              <a:t> a data frame </a:t>
-            </a:r>
-            <a:r>
-              <a:rPr lang="en-US" u="sng" dirty="0"/>
-              <a:t>as</a:t>
-            </a:r>
-            <a:r>
-              <a:rPr lang="en-US" dirty="0"/>
-              <a:t> a vector</a:t>
-            </a:r>
-            <a:r>
-              <a:rPr lang="en-US" dirty="0" smtClean="0"/>
-              <a:t>.</a:t>
-            </a:r>
-          </a:p>
-          <a:p>
-            <a:pPr lvl="1">
-              <a:lnSpc>
-                <a:spcPct val="150000"/>
-              </a:lnSpc>
-            </a:pPr>
-            <a:r>
-              <a:rPr lang="en-US" dirty="0"/>
-              <a:t>The </a:t>
-            </a:r>
-            <a:r>
-              <a:rPr lang="en-US" dirty="0" smtClean="0"/>
-              <a:t>[ ] </a:t>
-            </a:r>
-            <a:r>
-              <a:rPr lang="en-US" dirty="0"/>
-              <a:t>operator is used to extract a single column </a:t>
-            </a:r>
-            <a:r>
-              <a:rPr lang="en-US" u="sng" dirty="0"/>
-              <a:t>from</a:t>
-            </a:r>
-            <a:r>
-              <a:rPr lang="en-US" dirty="0"/>
-              <a:t> a data frame </a:t>
-            </a:r>
-            <a:r>
-              <a:rPr lang="en-US" u="sng" dirty="0"/>
-              <a:t>as</a:t>
-            </a:r>
-            <a:r>
-              <a:rPr lang="en-US" dirty="0"/>
-              <a:t> a data frame.</a:t>
-            </a:r>
-            <a:endParaRPr lang="da-DK" dirty="0" smtClean="0"/>
-          </a:p>
-          <a:p>
-            <a:pPr lvl="1">
-              <a:lnSpc>
-                <a:spcPct val="150000"/>
-              </a:lnSpc>
-            </a:pPr>
-            <a:r>
-              <a:rPr lang="en-US" dirty="0"/>
-              <a:t>The </a:t>
-            </a:r>
-            <a:r>
-              <a:rPr lang="en-US" dirty="0" smtClean="0"/>
-              <a:t>[[ ]] </a:t>
-            </a:r>
-            <a:r>
-              <a:rPr lang="en-US" dirty="0"/>
-              <a:t>operator is used to extract a single column </a:t>
-            </a:r>
-            <a:r>
-              <a:rPr lang="en-US" u="sng" dirty="0"/>
-              <a:t>from</a:t>
-            </a:r>
-            <a:r>
-              <a:rPr lang="en-US" dirty="0"/>
-              <a:t> a data frame </a:t>
-            </a:r>
-            <a:r>
-              <a:rPr lang="en-US" u="sng" dirty="0"/>
-              <a:t>as</a:t>
-            </a:r>
-            <a:r>
-              <a:rPr lang="en-US" dirty="0"/>
-              <a:t> a vector, but it can also be used to extract a single element </a:t>
-            </a:r>
-            <a:r>
-              <a:rPr lang="en-US" u="sng" dirty="0"/>
-              <a:t>from</a:t>
-            </a:r>
-            <a:r>
-              <a:rPr lang="en-US" dirty="0"/>
-              <a:t> a list</a:t>
-            </a:r>
-            <a:r>
-              <a:rPr lang="en-US" dirty="0" smtClean="0"/>
-              <a:t>.</a:t>
-            </a:r>
-          </a:p>
-          <a:p>
-            <a:pPr>
-              <a:lnSpc>
-                <a:spcPct val="150000"/>
-              </a:lnSpc>
-            </a:pPr>
-            <a:r>
-              <a:rPr lang="en-US" dirty="0" smtClean="0"/>
-              <a:t>= vs. </a:t>
-            </a:r>
-            <a:r>
-              <a:rPr lang="en-US" dirty="0" smtClean="0">
-                <a:sym typeface="Wingdings" panose="05000000000000000000" pitchFamily="2" charset="2"/>
-              </a:rPr>
-              <a:t> </a:t>
-            </a:r>
-          </a:p>
-          <a:p>
-            <a:pPr lvl="1">
-              <a:lnSpc>
-                <a:spcPct val="150000"/>
-              </a:lnSpc>
-            </a:pPr>
-            <a:r>
-              <a:rPr lang="en-US" dirty="0"/>
-              <a:t>In R, the </a:t>
-            </a:r>
-            <a:r>
-              <a:rPr lang="en-US" dirty="0" smtClean="0">
-                <a:sym typeface="Wingdings" panose="05000000000000000000" pitchFamily="2" charset="2"/>
-              </a:rPr>
-              <a:t> </a:t>
-            </a:r>
-            <a:r>
-              <a:rPr lang="en-US" dirty="0" smtClean="0"/>
-              <a:t>operator </a:t>
-            </a:r>
-            <a:r>
-              <a:rPr lang="en-US" dirty="0"/>
-              <a:t>is used for assignment, while the = operator is used for both assignment and argument specification in functions</a:t>
-            </a:r>
-            <a:r>
-              <a:rPr lang="en-US" dirty="0" smtClean="0"/>
-              <a:t>.</a:t>
-            </a:r>
-          </a:p>
-          <a:p>
-            <a:pPr lvl="1">
-              <a:lnSpc>
-                <a:spcPct val="150000"/>
-              </a:lnSpc>
-            </a:pPr>
-            <a:r>
-              <a:rPr lang="en-US" dirty="0"/>
-              <a:t>Best practice is to use </a:t>
-            </a:r>
-            <a:r>
-              <a:rPr lang="en-US" dirty="0" smtClean="0">
-                <a:sym typeface="Wingdings" panose="05000000000000000000" pitchFamily="2" charset="2"/>
-              </a:rPr>
-              <a:t></a:t>
-            </a:r>
-            <a:r>
-              <a:rPr lang="en-US" dirty="0" smtClean="0"/>
-              <a:t> </a:t>
-            </a:r>
-            <a:r>
-              <a:rPr lang="en-US" dirty="0"/>
-              <a:t>for assignment and = for argument specification in functions.</a:t>
-            </a:r>
-            <a:endParaRPr lang="en-US" dirty="0" smtClean="0"/>
-          </a:p>
-          <a:p>
-            <a:pPr lvl="1">
-              <a:lnSpc>
-                <a:spcPct val="150000"/>
-              </a:lnSpc>
-            </a:pPr>
-            <a:endParaRPr lang="da-DK" dirty="0"/>
-          </a:p>
-        </p:txBody>
-      </p:sp>
-      <p:sp>
-        <p:nvSpPr>
-          <p:cNvPr id="4" name="Pladsholder til dato 3"/>
-          <p:cNvSpPr>
-            <a:spLocks noGrp="1"/>
-          </p:cNvSpPr>
-          <p:nvPr>
-            <p:ph type="dt" sz="half" idx="14"/>
-          </p:nvPr>
-        </p:nvSpPr>
-        <p:spPr/>
-        <p:txBody>
-          <a:bodyPr/>
-          <a:lstStyle/>
-          <a:p>
-            <a:fld id="{D975665A-61CB-4DAB-8750-5B97BD1810B6}" type="datetime5">
-              <a:rPr lang="da-DK" smtClean="0"/>
-              <a:pPr/>
-              <a:t>oktober 2025</a:t>
-            </a:fld>
-            <a:endParaRPr lang="da-DK" dirty="0"/>
-          </a:p>
-        </p:txBody>
-      </p:sp>
-      <p:pic>
-        <p:nvPicPr>
-          <p:cNvPr id="5" name="Billede 4"/>
-          <p:cNvPicPr>
-            <a:picLocks noChangeAspect="1"/>
-          </p:cNvPicPr>
-          <p:nvPr/>
-        </p:nvPicPr>
-        <p:blipFill>
-          <a:blip r:embed="rId2"/>
-          <a:stretch>
-            <a:fillRect/>
-          </a:stretch>
-        </p:blipFill>
-        <p:spPr>
-          <a:xfrm>
-            <a:off x="6468785" y="1580518"/>
-            <a:ext cx="1190791" cy="295316"/>
-          </a:xfrm>
-          <a:prstGeom prst="rect">
-            <a:avLst/>
-          </a:prstGeom>
-          <a:ln w="12700">
-            <a:solidFill>
-              <a:schemeClr val="tx1"/>
-            </a:solidFill>
-          </a:ln>
-        </p:spPr>
-      </p:pic>
-      <p:pic>
-        <p:nvPicPr>
-          <p:cNvPr id="6" name="Billede 5"/>
-          <p:cNvPicPr>
-            <a:picLocks noChangeAspect="1"/>
-          </p:cNvPicPr>
-          <p:nvPr/>
-        </p:nvPicPr>
-        <p:blipFill>
-          <a:blip r:embed="rId3"/>
-          <a:stretch>
-            <a:fillRect/>
-          </a:stretch>
-        </p:blipFill>
-        <p:spPr>
-          <a:xfrm>
-            <a:off x="8164723" y="1604583"/>
-            <a:ext cx="3490437" cy="247186"/>
-          </a:xfrm>
-          <a:prstGeom prst="rect">
-            <a:avLst/>
-          </a:prstGeom>
-          <a:ln w="12700">
-            <a:solidFill>
-              <a:schemeClr val="tx1"/>
-            </a:solidFill>
-          </a:ln>
-        </p:spPr>
-      </p:pic>
-      <p:pic>
-        <p:nvPicPr>
-          <p:cNvPr id="8" name="Billede 7"/>
-          <p:cNvPicPr>
-            <a:picLocks noChangeAspect="1"/>
-          </p:cNvPicPr>
-          <p:nvPr/>
-        </p:nvPicPr>
-        <p:blipFill>
-          <a:blip r:embed="rId4"/>
-          <a:stretch>
-            <a:fillRect/>
-          </a:stretch>
-        </p:blipFill>
-        <p:spPr>
-          <a:xfrm>
-            <a:off x="6468785" y="2483965"/>
-            <a:ext cx="1152686" cy="209579"/>
-          </a:xfrm>
-          <a:prstGeom prst="rect">
-            <a:avLst/>
-          </a:prstGeom>
-        </p:spPr>
-        <p:style>
-          <a:lnRef idx="2">
-            <a:schemeClr val="dk1"/>
-          </a:lnRef>
-          <a:fillRef idx="1">
-            <a:schemeClr val="lt1"/>
-          </a:fillRef>
-          <a:effectRef idx="0">
-            <a:schemeClr val="dk1"/>
-          </a:effectRef>
-          <a:fontRef idx="minor">
-            <a:schemeClr val="dk1"/>
-          </a:fontRef>
-        </p:style>
-      </p:pic>
-      <p:pic>
-        <p:nvPicPr>
-          <p:cNvPr id="10" name="Billede 9"/>
-          <p:cNvPicPr>
-            <a:picLocks noChangeAspect="1"/>
-          </p:cNvPicPr>
-          <p:nvPr/>
-        </p:nvPicPr>
-        <p:blipFill>
-          <a:blip r:embed="rId5"/>
-          <a:stretch>
-            <a:fillRect/>
-          </a:stretch>
-        </p:blipFill>
-        <p:spPr>
-          <a:xfrm>
-            <a:off x="8164723" y="2057398"/>
-            <a:ext cx="1778882" cy="1411388"/>
-          </a:xfrm>
-          <a:prstGeom prst="rect">
-            <a:avLst/>
-          </a:prstGeom>
-          <a:ln w="12700">
-            <a:solidFill>
-              <a:schemeClr val="tx1"/>
-            </a:solidFill>
-          </a:ln>
-        </p:spPr>
-      </p:pic>
-      <p:pic>
-        <p:nvPicPr>
-          <p:cNvPr id="11" name="Billede 10"/>
-          <p:cNvPicPr>
-            <a:picLocks noChangeAspect="1"/>
-          </p:cNvPicPr>
-          <p:nvPr/>
-        </p:nvPicPr>
-        <p:blipFill>
-          <a:blip r:embed="rId6"/>
-          <a:stretch>
-            <a:fillRect/>
-          </a:stretch>
-        </p:blipFill>
-        <p:spPr>
-          <a:xfrm>
-            <a:off x="6468786" y="3731074"/>
-            <a:ext cx="1295581" cy="190527"/>
-          </a:xfrm>
-          <a:prstGeom prst="rect">
-            <a:avLst/>
-          </a:prstGeom>
-        </p:spPr>
-        <p:style>
-          <a:lnRef idx="2">
-            <a:schemeClr val="dk1"/>
-          </a:lnRef>
-          <a:fillRef idx="1">
-            <a:schemeClr val="lt1"/>
-          </a:fillRef>
-          <a:effectRef idx="0">
-            <a:schemeClr val="dk1"/>
-          </a:effectRef>
-          <a:fontRef idx="minor">
-            <a:schemeClr val="dk1"/>
-          </a:fontRef>
-        </p:style>
-      </p:pic>
-      <p:pic>
-        <p:nvPicPr>
-          <p:cNvPr id="12" name="Billede 11"/>
-          <p:cNvPicPr>
-            <a:picLocks noChangeAspect="1"/>
-          </p:cNvPicPr>
-          <p:nvPr/>
-        </p:nvPicPr>
-        <p:blipFill>
-          <a:blip r:embed="rId3"/>
-          <a:stretch>
-            <a:fillRect/>
-          </a:stretch>
-        </p:blipFill>
-        <p:spPr>
-          <a:xfrm>
-            <a:off x="8164723" y="3674415"/>
-            <a:ext cx="3490437" cy="247186"/>
-          </a:xfrm>
-          <a:prstGeom prst="rect">
-            <a:avLst/>
-          </a:prstGeom>
-          <a:ln w="12700">
-            <a:solidFill>
-              <a:schemeClr val="tx1"/>
-            </a:solidFill>
-          </a:ln>
-        </p:spPr>
-      </p:pic>
-      <p:sp>
-        <p:nvSpPr>
-          <p:cNvPr id="13" name="Højrepil 12"/>
-          <p:cNvSpPr/>
-          <p:nvPr/>
-        </p:nvSpPr>
-        <p:spPr>
-          <a:xfrm>
-            <a:off x="7763657" y="1700822"/>
-            <a:ext cx="296985" cy="54708"/>
-          </a:xfrm>
-          <a:prstGeom prst="rightArrow">
-            <a:avLst/>
-          </a:prstGeom>
-          <a:solidFill>
-            <a:schemeClr val="tx1"/>
-          </a:solidFill>
-          <a:ln>
-            <a:solidFill>
-              <a:schemeClr val="tx1"/>
-            </a:solidFill>
-          </a:ln>
-        </p:spPr>
-        <p:style>
-          <a:lnRef idx="2">
-            <a:schemeClr val="accent1">
-              <a:shade val="50000"/>
-            </a:schemeClr>
-          </a:lnRef>
-          <a:fillRef idx="1">
-            <a:schemeClr val="accent1"/>
-          </a:fillRef>
-          <a:effectRef idx="0">
-            <a:schemeClr val="accent1"/>
-          </a:effectRef>
-          <a:fontRef idx="minor">
-            <a:schemeClr val="lt1"/>
-          </a:fontRef>
-        </p:style>
-        <p:txBody>
-          <a:bodyPr rtlCol="0" anchor="ctr"/>
-          <a:lstStyle/>
-          <a:p>
-            <a:pPr algn="ctr"/>
-            <a:endParaRPr lang="da-DK" sz="2000" noProof="0" dirty="0" err="1" smtClean="0"/>
-          </a:p>
-        </p:txBody>
-      </p:sp>
-      <p:sp>
-        <p:nvSpPr>
-          <p:cNvPr id="14" name="Højrepil 13"/>
-          <p:cNvSpPr/>
-          <p:nvPr/>
-        </p:nvSpPr>
-        <p:spPr>
-          <a:xfrm>
-            <a:off x="7763657" y="2561400"/>
-            <a:ext cx="296985" cy="54708"/>
-          </a:xfrm>
-          <a:prstGeom prst="rightArrow">
-            <a:avLst/>
-          </a:prstGeom>
-          <a:solidFill>
-            <a:schemeClr val="tx1"/>
-          </a:solidFill>
-          <a:ln>
-            <a:solidFill>
-              <a:schemeClr val="tx1"/>
-            </a:solidFill>
-          </a:ln>
-        </p:spPr>
-        <p:style>
-          <a:lnRef idx="2">
-            <a:schemeClr val="accent1">
-              <a:shade val="50000"/>
-            </a:schemeClr>
-          </a:lnRef>
-          <a:fillRef idx="1">
-            <a:schemeClr val="accent1"/>
-          </a:fillRef>
-          <a:effectRef idx="0">
-            <a:schemeClr val="accent1"/>
-          </a:effectRef>
-          <a:fontRef idx="minor">
-            <a:schemeClr val="lt1"/>
-          </a:fontRef>
-        </p:style>
-        <p:txBody>
-          <a:bodyPr rtlCol="0" anchor="ctr"/>
-          <a:lstStyle/>
-          <a:p>
-            <a:pPr algn="ctr"/>
-            <a:endParaRPr lang="da-DK" sz="2000" noProof="0" dirty="0" err="1" smtClean="0"/>
-          </a:p>
-        </p:txBody>
-      </p:sp>
-      <p:sp>
-        <p:nvSpPr>
-          <p:cNvPr id="15" name="Højrepil 14"/>
-          <p:cNvSpPr/>
-          <p:nvPr/>
-        </p:nvSpPr>
-        <p:spPr>
-          <a:xfrm>
-            <a:off x="7816052" y="3772607"/>
-            <a:ext cx="296985" cy="54708"/>
-          </a:xfrm>
-          <a:prstGeom prst="rightArrow">
-            <a:avLst/>
-          </a:prstGeom>
-          <a:solidFill>
-            <a:schemeClr val="tx1"/>
-          </a:solidFill>
-          <a:ln>
-            <a:solidFill>
-              <a:schemeClr val="tx1"/>
-            </a:solidFill>
-          </a:ln>
-        </p:spPr>
-        <p:style>
-          <a:lnRef idx="2">
-            <a:schemeClr val="accent1">
-              <a:shade val="50000"/>
-            </a:schemeClr>
-          </a:lnRef>
-          <a:fillRef idx="1">
-            <a:schemeClr val="accent1"/>
-          </a:fillRef>
-          <a:effectRef idx="0">
-            <a:schemeClr val="accent1"/>
-          </a:effectRef>
-          <a:fontRef idx="minor">
-            <a:schemeClr val="lt1"/>
-          </a:fontRef>
-        </p:style>
-        <p:txBody>
-          <a:bodyPr rtlCol="0" anchor="ctr"/>
-          <a:lstStyle/>
-          <a:p>
-            <a:pPr algn="ctr"/>
-            <a:endParaRPr lang="da-DK" sz="2000" noProof="0" dirty="0" err="1" smtClean="0"/>
-          </a:p>
-        </p:txBody>
-      </p:sp>
-      <p:pic>
-        <p:nvPicPr>
-          <p:cNvPr id="16" name="Billede 15"/>
-          <p:cNvPicPr>
-            <a:picLocks noChangeAspect="1"/>
-          </p:cNvPicPr>
-          <p:nvPr/>
-        </p:nvPicPr>
-        <p:blipFill>
-          <a:blip r:embed="rId7"/>
-          <a:stretch>
-            <a:fillRect/>
-          </a:stretch>
-        </p:blipFill>
-        <p:spPr>
-          <a:xfrm>
-            <a:off x="6417098" y="4591652"/>
-            <a:ext cx="5503327" cy="601457"/>
-          </a:xfrm>
-          <a:prstGeom prst="rect">
-            <a:avLst/>
-          </a:prstGeom>
-        </p:spPr>
-        <p:style>
-          <a:lnRef idx="2">
-            <a:schemeClr val="dk1"/>
-          </a:lnRef>
-          <a:fillRef idx="1">
-            <a:schemeClr val="lt1"/>
-          </a:fillRef>
-          <a:effectRef idx="0">
-            <a:schemeClr val="dk1"/>
-          </a:effectRef>
-          <a:fontRef idx="minor">
-            <a:schemeClr val="dk1"/>
-          </a:fontRef>
-        </p:style>
-      </p:pic>
-    </p:spTree>
-    <p:extLst>
-      <p:ext uri="{BB962C8B-B14F-4D97-AF65-F5344CB8AC3E}">
-        <p14:creationId xmlns:p14="http://schemas.microsoft.com/office/powerpoint/2010/main" val="3430299236"/>
-      </p:ext>
-    </p:extLst>
-  </p:cSld>
-  <p:clrMapOvr>
-    <a:masterClrMapping/>
-  </p:clrMapOvr>
-  <p:timing>
-    <p:tnLst>
-      <p:par>
-        <p:cTn id="1" dur="indefinite" restart="never" nodeType="tmRoot"/>
-      </p:par>
-    </p:tnLst>
-  </p:timing>
 </p:sld>
 </file>
 
@@ -9692,6 +9396,15 @@
 </file>
 
 <file path=customXml/item1.xml><?xml version="1.0" encoding="utf-8"?>
+<?mso-contentType ?>
+<FormTemplates xmlns="http://schemas.microsoft.com/sharepoint/v3/contenttype/forms">
+  <Display>DocumentLibraryForm</Display>
+  <Edit>DocumentLibraryForm</Edit>
+  <New>DocumentLibraryForm</New>
+</FormTemplates>
+</file>
+
+<file path=customXml/item2.xml><?xml version="1.0" encoding="utf-8"?>
 <ct:contentTypeSchema xmlns:ct="http://schemas.microsoft.com/office/2006/metadata/contentType" xmlns:ma="http://schemas.microsoft.com/office/2006/metadata/properties/metaAttributes" ct:_="" ma:_="" ma:contentTypeName="Dokument" ma:contentTypeID="0x010100FF5B58FCC8F5544985DB3558CBE1F87E" ma:contentTypeVersion="14" ma:contentTypeDescription="Opret et nyt dokument." ma:contentTypeScope="" ma:versionID="b7c2f1d232fc855043ffcd80aec3aebe">
   <xsd:schema xmlns:xsd="http://www.w3.org/2001/XMLSchema" xmlns:xs="http://www.w3.org/2001/XMLSchema" xmlns:p="http://schemas.microsoft.com/office/2006/metadata/properties" xmlns:ns3="1a43b5db-ac85-43fe-b390-45ab55dbfe1b" xmlns:ns4="818acaa3-a4d3-4817-8e60-f4713c6ef536" targetNamespace="http://schemas.microsoft.com/office/2006/metadata/properties" ma:root="true" ma:fieldsID="45be2eef014988cdc3d30f651f58f9ed" ns3:_="" ns4:_="">
     <xsd:import namespace="1a43b5db-ac85-43fe-b390-45ab55dbfe1b"/>
@@ -9918,15 +9631,6 @@
 </ct:contentTypeSchema>
 </file>
 
-<file path=customXml/item2.xml><?xml version="1.0" encoding="utf-8"?>
-<?mso-contentType ?>
-<FormTemplates xmlns="http://schemas.microsoft.com/sharepoint/v3/contenttype/forms">
-  <Display>DocumentLibraryForm</Display>
-  <Edit>DocumentLibraryForm</Edit>
-  <New>DocumentLibraryForm</New>
-</FormTemplates>
-</file>
-
 <file path=customXml/item3.xml><?xml version="1.0" encoding="utf-8"?>
 <p:properties xmlns:p="http://schemas.microsoft.com/office/2006/metadata/properties" xmlns:xsi="http://www.w3.org/2001/XMLSchema-instance" xmlns:pc="http://schemas.microsoft.com/office/infopath/2007/PartnerControls">
   <documentManagement>
@@ -9936,6 +9640,14 @@
 </file>
 
 <file path=customXml/itemProps1.xml><?xml version="1.0" encoding="utf-8"?>
+<ds:datastoreItem xmlns:ds="http://schemas.openxmlformats.org/officeDocument/2006/customXml" ds:itemID="{6DAE7A2C-F693-4EEB-B7F6-84AE229897D1}">
+  <ds:schemaRefs>
+    <ds:schemaRef ds:uri="http://schemas.microsoft.com/sharepoint/v3/contenttype/forms"/>
+  </ds:schemaRefs>
+</ds:datastoreItem>
+</file>
+
+<file path=customXml/itemProps2.xml><?xml version="1.0" encoding="utf-8"?>
 <ds:datastoreItem xmlns:ds="http://schemas.openxmlformats.org/officeDocument/2006/customXml" ds:itemID="{E69857E6-3BC1-4261-91A3-6FFC5B991ACF}">
   <ds:schemaRefs>
     <ds:schemaRef ds:uri="http://schemas.microsoft.com/office/2006/metadata/contentType"/>
@@ -9950,14 +9662,6 @@
     <ds:schemaRef ds:uri="http://purl.org/dc/elements/1.1/"/>
     <ds:schemaRef ds:uri="http://purl.org/dc/terms/"/>
     <ds:schemaRef ds:uri="http://schemas.microsoft.com/internal/obd"/>
-  </ds:schemaRefs>
-</ds:datastoreItem>
-</file>
-
-<file path=customXml/itemProps2.xml><?xml version="1.0" encoding="utf-8"?>
-<ds:datastoreItem xmlns:ds="http://schemas.openxmlformats.org/officeDocument/2006/customXml" ds:itemID="{6DAE7A2C-F693-4EEB-B7F6-84AE229897D1}">
-  <ds:schemaRefs>
-    <ds:schemaRef ds:uri="http://schemas.microsoft.com/sharepoint/v3/contenttype/forms"/>
   </ds:schemaRefs>
 </ds:datastoreItem>
 </file>
